--- a/assets/figures-editable/c3-c4/c4-e13.pptx
+++ b/assets/figures-editable/c3-c4/c4-e13.pptx
@@ -3104,8 +3104,8 @@
         </p:nvSpPr>
         <p:spPr>
           <a:xfrm>
-            <a:off x="274320" y="137160"/>
-            <a:ext cx="11612880" cy="365760"/>
+            <a:off x="274320" y="118872"/>
+            <a:ext cx="11612880" cy="340105"/>
           </a:xfrm>
           <a:prstGeom prst="rect">
             <a:avLst/>
@@ -3114,7 +3114,7 @@
           <a:effectLst/>
         </p:spPr>
         <p:txBody>
-          <a:bodyPr wrap="square" lIns="27432" rIns="27432" tIns="18288" bIns="18288" anchor="ctr">
+          <a:bodyPr wrap="none" lIns="18288" rIns="18288" tIns="18288" bIns="18288" anchor="t">
             <a:spAutoFit/>
           </a:bodyPr>
           <a:lstStyle/>
@@ -3125,7 +3125,7 @@
               </a:spcAft>
             </a:pPr>
             <a:r>
-              <a:rPr sz="2100" b="0" i="0">
+              <a:rPr sz="1900" b="1" i="0">
                 <a:solidFill>
                   <a:srgbClr val="8EDBD4"/>
                 </a:solidFill>
@@ -3136,72 +3136,110 @@
           </a:p>
         </p:txBody>
       </p:sp>
-      <p:cxnSp>
-        <p:nvCxnSpPr>
-          <p:cNvPr id="3" name="C4-E13 line 1" descr="sci-ppt:o001"/>
-          <p:cNvCxnSpPr/>
+      <p:sp>
+        <p:nvSpPr>
+          <p:cNvPr id="3" name="C4-E13 round_rect 1" descr="sci-ppt:o001"/>
+          <p:cNvSpPr/>
           <p:nvPr/>
-        </p:nvCxnSpPr>
-        <p:spPr>
-          <a:xfrm>
-            <a:off x="731520" y="2880360"/>
-            <a:ext cx="6675120" cy="0"/>
-          </a:xfrm>
-          <a:prstGeom prst="line">
+        </p:nvSpPr>
+        <p:spPr>
+          <a:xfrm>
+            <a:off x="365760" y="914400"/>
+            <a:ext cx="6309360" cy="4846320"/>
+          </a:xfrm>
+          <a:prstGeom prst="roundRect">
             <a:avLst/>
           </a:prstGeom>
-          <a:ln w="25400">
-            <a:solidFill>
-              <a:srgbClr val="B4C7D2"/>
-            </a:solidFill>
-          </a:ln>
-          <a:effectLst/>
-        </p:spPr>
-      </p:cxnSp>
-      <p:cxnSp>
-        <p:nvCxnSpPr>
-          <p:cNvPr id="4" name="C4-E13 line 2" descr="sci-ppt:o002"/>
-          <p:cNvCxnSpPr/>
-          <p:nvPr/>
-        </p:nvCxnSpPr>
-        <p:spPr>
-          <a:xfrm flipV="1">
-            <a:off x="1005840" y="2876570"/>
-            <a:ext cx="76581" cy="3790"/>
-          </a:xfrm>
-          <a:prstGeom prst="line">
-            <a:avLst/>
-          </a:prstGeom>
-          <a:ln w="25400">
+          <a:solidFill>
+            <a:srgbClr val="213E4B"/>
+          </a:solidFill>
+          <a:ln w="20320">
             <a:solidFill>
               <a:srgbClr val="8EDBD4"/>
             </a:solidFill>
           </a:ln>
           <a:effectLst/>
         </p:spPr>
-      </p:cxnSp>
-      <p:cxnSp>
-        <p:nvCxnSpPr>
-          <p:cNvPr id="5" name="C4-E13 line 3" descr="sci-ppt:o003"/>
-          <p:cNvCxnSpPr/>
+        <p:txBody>
+          <a:bodyPr rtlCol="0" anchor="ctr"/>
+          <a:lstStyle/>
+          <a:p>
+            <a:pPr algn="ctr"/>
+          </a:p>
+        </p:txBody>
+      </p:sp>
+      <p:sp>
+        <p:nvSpPr>
+          <p:cNvPr id="4" name="C4-E13 text 2" descr="sci-ppt:o002"/>
+          <p:cNvSpPr txBox="1"/>
           <p:nvPr/>
-        </p:nvCxnSpPr>
-        <p:spPr>
-          <a:xfrm flipV="1">
-            <a:off x="1082421" y="2865582"/>
-            <a:ext cx="76581" cy="10988"/>
-          </a:xfrm>
-          <a:prstGeom prst="line">
+        </p:nvSpPr>
+        <p:spPr>
+          <a:xfrm>
+            <a:off x="475488" y="969264"/>
+            <a:ext cx="6089904" cy="254889"/>
+          </a:xfrm>
+          <a:prstGeom prst="rect">
             <a:avLst/>
           </a:prstGeom>
-          <a:ln w="25400">
+          <a:noFill/>
+          <a:effectLst/>
+        </p:spPr>
+        <p:txBody>
+          <a:bodyPr wrap="none" lIns="18288" rIns="18288" tIns="18288" bIns="18288" anchor="t">
+            <a:spAutoFit/>
+          </a:bodyPr>
+          <a:lstStyle/>
+          <a:p>
+            <a:pPr algn="l">
+              <a:spcAft>
+                <a:spcPts val="0"/>
+              </a:spcAft>
+            </a:pPr>
+            <a:r>
+              <a:rPr sz="1350" b="1" i="0">
+                <a:solidFill>
+                  <a:srgbClr val="8EDBD4"/>
+                </a:solidFill>
+                <a:latin typeface="Arial"/>
+              </a:rPr>
+              <a:t>Clamped circular delamination under p₀</a:t>
+            </a:r>
+          </a:p>
+        </p:txBody>
+      </p:sp>
+      <p:sp>
+        <p:nvSpPr>
+          <p:cNvPr id="5" name="C4-E13 ellipse 3" descr="sci-ppt:o003"/>
+          <p:cNvSpPr/>
+          <p:nvPr/>
+        </p:nvSpPr>
+        <p:spPr>
+          <a:xfrm>
+            <a:off x="1508760" y="2057400"/>
+            <a:ext cx="4023360" cy="1828800"/>
+          </a:xfrm>
+          <a:prstGeom prst="ellipse">
+            <a:avLst/>
+          </a:prstGeom>
+          <a:solidFill>
+            <a:srgbClr val="1E4A5A"/>
+          </a:solidFill>
+          <a:ln w="27940">
             <a:solidFill>
               <a:srgbClr val="8EDBD4"/>
             </a:solidFill>
           </a:ln>
           <a:effectLst/>
         </p:spPr>
-      </p:cxnSp>
+        <p:txBody>
+          <a:bodyPr rtlCol="0" anchor="ctr"/>
+          <a:lstStyle/>
+          <a:p>
+            <a:pPr algn="ctr"/>
+          </a:p>
+        </p:txBody>
+      </p:sp>
       <p:cxnSp>
         <p:nvCxnSpPr>
           <p:cNvPr id="6" name="C4-E13 line 4" descr="sci-ppt:o004"/>
@@ -3209,17 +3247,18 @@
           <p:nvPr/>
         </p:nvCxnSpPr>
         <p:spPr>
-          <a:xfrm flipV="1">
-            <a:off x="1159002" y="2847958"/>
-            <a:ext cx="76581" cy="17624"/>
+          <a:xfrm>
+            <a:off x="1508760" y="2971800"/>
+            <a:ext cx="4023360" cy="0"/>
           </a:xfrm>
           <a:prstGeom prst="line">
             <a:avLst/>
           </a:prstGeom>
-          <a:ln w="25400">
+          <a:ln w="15240">
             <a:solidFill>
-              <a:srgbClr val="8EDBD4"/>
+              <a:srgbClr val="B4C7D2"/>
             </a:solidFill>
+            <a:prstDash val="dash"/>
           </a:ln>
           <a:effectLst/>
         </p:spPr>
@@ -3231,16 +3270,16 @@
           <p:nvPr/>
         </p:nvCxnSpPr>
         <p:spPr>
-          <a:xfrm flipV="1">
-            <a:off x="1235583" y="2824243"/>
-            <a:ext cx="76581" cy="23715"/>
+          <a:xfrm>
+            <a:off x="3520440" y="4114800"/>
+            <a:ext cx="2011680" cy="0"/>
           </a:xfrm>
           <a:prstGeom prst="line">
             <a:avLst/>
           </a:prstGeom>
-          <a:ln w="25400">
+          <a:ln w="16510">
             <a:solidFill>
-              <a:srgbClr val="8EDBD4"/>
+              <a:srgbClr val="B4C7D2"/>
             </a:solidFill>
           </a:ln>
           <a:effectLst/>
@@ -3253,16 +3292,16 @@
           <p:nvPr/>
         </p:nvCxnSpPr>
         <p:spPr>
-          <a:xfrm flipV="1">
-            <a:off x="1312164" y="2794969"/>
-            <a:ext cx="76581" cy="29274"/>
+          <a:xfrm>
+            <a:off x="3520440" y="4050791"/>
+            <a:ext cx="0" cy="128017"/>
           </a:xfrm>
           <a:prstGeom prst="line">
             <a:avLst/>
           </a:prstGeom>
-          <a:ln w="25400">
+          <a:ln w="16510">
             <a:solidFill>
-              <a:srgbClr val="8EDBD4"/>
+              <a:srgbClr val="B4C7D2"/>
             </a:solidFill>
           </a:ln>
           <a:effectLst/>
@@ -3275,1673 +3314,669 @@
           <p:nvPr/>
         </p:nvCxnSpPr>
         <p:spPr>
-          <a:xfrm flipV="1">
-            <a:off x="1388745" y="2760655"/>
-            <a:ext cx="76581" cy="34314"/>
+          <a:xfrm>
+            <a:off x="5532120" y="4050791"/>
+            <a:ext cx="0" cy="128017"/>
           </a:xfrm>
           <a:prstGeom prst="line">
             <a:avLst/>
           </a:prstGeom>
-          <a:ln w="25400">
+          <a:ln w="16510">
+            <a:solidFill>
+              <a:srgbClr val="B4C7D2"/>
+            </a:solidFill>
+          </a:ln>
+          <a:effectLst/>
+        </p:spPr>
+      </p:cxnSp>
+      <p:sp>
+        <p:nvSpPr>
+          <p:cNvPr id="10" name="C4-E13 text 8" descr="sci-ppt:o008"/>
+          <p:cNvSpPr txBox="1"/>
+          <p:nvPr/>
+        </p:nvSpPr>
+        <p:spPr>
+          <a:xfrm>
+            <a:off x="3611880" y="4202430"/>
+            <a:ext cx="1828800" cy="239395"/>
+          </a:xfrm>
+          <a:prstGeom prst="rect">
+            <a:avLst/>
+          </a:prstGeom>
+          <a:noFill/>
+          <a:effectLst/>
+        </p:spPr>
+        <p:txBody>
+          <a:bodyPr wrap="none" lIns="18288" rIns="18288" tIns="18288" bIns="18288" anchor="t">
+            <a:spAutoFit/>
+          </a:bodyPr>
+          <a:lstStyle/>
+          <a:p>
+            <a:pPr algn="ctr">
+              <a:spcAft>
+                <a:spcPts val="0"/>
+              </a:spcAft>
+            </a:pPr>
+            <a:r>
+              <a:rPr sz="1250" b="0" i="0">
+                <a:solidFill>
+                  <a:srgbClr val="B4C7D2"/>
+                </a:solidFill>
+                <a:latin typeface="Arial"/>
+              </a:rPr>
+              <a:t>b</a:t>
+            </a:r>
+          </a:p>
+        </p:txBody>
+      </p:sp>
+      <p:cxnSp>
+        <p:nvCxnSpPr>
+          <p:cNvPr id="11" name="C4-E13 arrow 9" descr="sci-ppt:o009"/>
+          <p:cNvCxnSpPr/>
+          <p:nvPr/>
+        </p:nvCxnSpPr>
+        <p:spPr>
+          <a:xfrm>
+            <a:off x="2423160" y="1645920"/>
+            <a:ext cx="0" cy="502920"/>
+          </a:xfrm>
+          <a:prstGeom prst="line">
+            <a:avLst/>
+          </a:prstGeom>
+          <a:ln w="38100">
+            <a:solidFill>
+              <a:srgbClr val="F28BA0"/>
+            </a:solidFill>
+            <a:headEnd type="none" w="med" len="med"/>
+            <a:tailEnd type="triangle" w="med" len="med"/>
+          </a:ln>
+          <a:effectLst/>
+        </p:spPr>
+      </p:cxnSp>
+      <p:cxnSp>
+        <p:nvCxnSpPr>
+          <p:cNvPr id="12" name="C4-E13 arrow 10" descr="sci-ppt:o010"/>
+          <p:cNvCxnSpPr/>
+          <p:nvPr/>
+        </p:nvCxnSpPr>
+        <p:spPr>
+          <a:xfrm>
+            <a:off x="3520440" y="1645920"/>
+            <a:ext cx="0" cy="502920"/>
+          </a:xfrm>
+          <a:prstGeom prst="line">
+            <a:avLst/>
+          </a:prstGeom>
+          <a:ln w="38100">
+            <a:solidFill>
+              <a:srgbClr val="F28BA0"/>
+            </a:solidFill>
+            <a:headEnd type="none" w="med" len="med"/>
+            <a:tailEnd type="triangle" w="med" len="med"/>
+          </a:ln>
+          <a:effectLst/>
+        </p:spPr>
+      </p:cxnSp>
+      <p:cxnSp>
+        <p:nvCxnSpPr>
+          <p:cNvPr id="13" name="C4-E13 arrow 11" descr="sci-ppt:o011"/>
+          <p:cNvCxnSpPr/>
+          <p:nvPr/>
+        </p:nvCxnSpPr>
+        <p:spPr>
+          <a:xfrm>
+            <a:off x="4617720" y="1645920"/>
+            <a:ext cx="0" cy="502920"/>
+          </a:xfrm>
+          <a:prstGeom prst="line">
+            <a:avLst/>
+          </a:prstGeom>
+          <a:ln w="38100">
+            <a:solidFill>
+              <a:srgbClr val="F28BA0"/>
+            </a:solidFill>
+            <a:headEnd type="none" w="med" len="med"/>
+            <a:tailEnd type="triangle" w="med" len="med"/>
+          </a:ln>
+          <a:effectLst/>
+        </p:spPr>
+      </p:cxnSp>
+      <p:sp>
+        <p:nvSpPr>
+          <p:cNvPr id="14" name="C4-E13 text 12" descr="sci-ppt:o012"/>
+          <p:cNvSpPr txBox="1"/>
+          <p:nvPr/>
+        </p:nvSpPr>
+        <p:spPr>
+          <a:xfrm>
+            <a:off x="2148840" y="1280160"/>
+            <a:ext cx="2743200" cy="231648"/>
+          </a:xfrm>
+          <a:prstGeom prst="rect">
+            <a:avLst/>
+          </a:prstGeom>
+          <a:noFill/>
+          <a:effectLst/>
+        </p:spPr>
+        <p:txBody>
+          <a:bodyPr wrap="none" lIns="18288" rIns="18288" tIns="18288" bIns="18288" anchor="t">
+            <a:spAutoFit/>
+          </a:bodyPr>
+          <a:lstStyle/>
+          <a:p>
+            <a:pPr algn="ctr">
+              <a:spcAft>
+                <a:spcPts val="0"/>
+              </a:spcAft>
+            </a:pPr>
+            <a:r>
+              <a:rPr sz="1200" b="1" i="0">
+                <a:solidFill>
+                  <a:srgbClr val="F28BA0"/>
+                </a:solidFill>
+                <a:latin typeface="Arial"/>
+              </a:rPr>
+              <a:t>uniform pressure p₀</a:t>
+            </a:r>
+          </a:p>
+        </p:txBody>
+      </p:sp>
+      <p:sp>
+        <p:nvSpPr>
+          <p:cNvPr id="15" name="C4-E13 text 13" descr="sci-ppt:o013"/>
+          <p:cNvSpPr txBox="1"/>
+          <p:nvPr/>
+        </p:nvSpPr>
+        <p:spPr>
+          <a:xfrm>
+            <a:off x="548640" y="4480560"/>
+            <a:ext cx="6035040" cy="239395"/>
+          </a:xfrm>
+          <a:prstGeom prst="rect">
+            <a:avLst/>
+          </a:prstGeom>
+          <a:noFill/>
+          <a:effectLst/>
+        </p:spPr>
+        <p:txBody>
+          <a:bodyPr wrap="none" lIns="18288" rIns="18288" tIns="18288" bIns="18288" anchor="t">
+            <a:spAutoFit/>
+          </a:bodyPr>
+          <a:lstStyle/>
+          <a:p>
+            <a:pPr algn="l">
+              <a:spcAft>
+                <a:spcPts val="0"/>
+              </a:spcAft>
+            </a:pPr>
+            <a:r>
+              <a:rPr sz="1250" b="1" i="0">
+                <a:solidFill>
+                  <a:srgbClr val="E7F0F3"/>
+                </a:solidFill>
+                <a:latin typeface="Arial"/>
+              </a:rPr>
+              <a:t>𝓛ᵣ g = p₀ / D_f,   g = 𝓛ᵣ w,   𝓛ᵣ f = (1/r) d/dr (r df/dr)</a:t>
+            </a:r>
+          </a:p>
+        </p:txBody>
+      </p:sp>
+      <p:sp>
+        <p:nvSpPr>
+          <p:cNvPr id="16" name="C4-E13 text 14" descr="sci-ppt:o014"/>
+          <p:cNvSpPr txBox="1"/>
+          <p:nvPr/>
+        </p:nvSpPr>
+        <p:spPr>
+          <a:xfrm>
+            <a:off x="548640" y="4937760"/>
+            <a:ext cx="6035040" cy="239395"/>
+          </a:xfrm>
+          <a:prstGeom prst="rect">
+            <a:avLst/>
+          </a:prstGeom>
+          <a:noFill/>
+          <a:effectLst/>
+        </p:spPr>
+        <p:txBody>
+          <a:bodyPr wrap="none" lIns="18288" rIns="18288" tIns="18288" bIns="18288" anchor="t">
+            <a:spAutoFit/>
+          </a:bodyPr>
+          <a:lstStyle/>
+          <a:p>
+            <a:pPr algn="l">
+              <a:spcAft>
+                <a:spcPts val="0"/>
+              </a:spcAft>
+            </a:pPr>
+            <a:r>
+              <a:rPr sz="1250" b="1" i="0">
+                <a:solidFill>
+                  <a:srgbClr val="F2B880"/>
+                </a:solidFill>
+                <a:latin typeface="Arial"/>
+              </a:rPr>
+              <a:t>w(b) = 0,  w′(b) = 0 (clamped edge);  fields regular at r = 0</a:t>
+            </a:r>
+          </a:p>
+        </p:txBody>
+      </p:sp>
+      <p:sp>
+        <p:nvSpPr>
+          <p:cNvPr id="17" name="C4-E13 round_rect 15" descr="sci-ppt:o015"/>
+          <p:cNvSpPr/>
+          <p:nvPr/>
+        </p:nvSpPr>
+        <p:spPr>
+          <a:xfrm>
+            <a:off x="6858000" y="914400"/>
+            <a:ext cx="4983480" cy="4846320"/>
+          </a:xfrm>
+          <a:prstGeom prst="roundRect">
+            <a:avLst/>
+          </a:prstGeom>
+          <a:solidFill>
+            <a:srgbClr val="213E4B"/>
+          </a:solidFill>
+          <a:ln w="20320">
             <a:solidFill>
               <a:srgbClr val="8EDBD4"/>
             </a:solidFill>
           </a:ln>
           <a:effectLst/>
         </p:spPr>
-      </p:cxnSp>
-      <p:cxnSp>
-        <p:nvCxnSpPr>
-          <p:cNvPr id="10" name="C4-E13 line 8" descr="sci-ppt:o008"/>
-          <p:cNvCxnSpPr/>
+        <p:txBody>
+          <a:bodyPr rtlCol="0" anchor="ctr"/>
+          <a:lstStyle/>
+          <a:p>
+            <a:pPr algn="ctr"/>
+          </a:p>
+        </p:txBody>
+      </p:sp>
+      <p:sp>
+        <p:nvSpPr>
+          <p:cNvPr id="18" name="C4-E13 text 16" descr="sci-ppt:o016"/>
+          <p:cNvSpPr txBox="1"/>
           <p:nvPr/>
-        </p:nvCxnSpPr>
-        <p:spPr>
-          <a:xfrm flipV="1">
-            <a:off x="1465326" y="2721802"/>
-            <a:ext cx="76581" cy="38853"/>
-          </a:xfrm>
-          <a:prstGeom prst="line">
+        </p:nvSpPr>
+        <p:spPr>
+          <a:xfrm>
+            <a:off x="6967728" y="969264"/>
+            <a:ext cx="4764024" cy="254889"/>
+          </a:xfrm>
+          <a:prstGeom prst="rect">
             <a:avLst/>
           </a:prstGeom>
-          <a:ln w="25400">
+          <a:noFill/>
+          <a:effectLst/>
+        </p:spPr>
+        <p:txBody>
+          <a:bodyPr wrap="none" lIns="18288" rIns="18288" tIns="18288" bIns="18288" anchor="t">
+            <a:spAutoFit/>
+          </a:bodyPr>
+          <a:lstStyle/>
+          <a:p>
+            <a:pPr algn="l">
+              <a:spcAft>
+                <a:spcPts val="0"/>
+              </a:spcAft>
+            </a:pPr>
+            <a:r>
+              <a:rPr sz="1350" b="1" i="0">
+                <a:solidFill>
+                  <a:srgbClr val="8EDBD4"/>
+                </a:solidFill>
+                <a:latin typeface="Arial"/>
+              </a:rPr>
+              <a:t>Reading the boundary-value problem</a:t>
+            </a:r>
+          </a:p>
+        </p:txBody>
+      </p:sp>
+      <p:sp>
+        <p:nvSpPr>
+          <p:cNvPr id="19" name="C4-E13 text 17" descr="sci-ppt:o017"/>
+          <p:cNvSpPr txBox="1"/>
+          <p:nvPr/>
+        </p:nvSpPr>
+        <p:spPr>
+          <a:xfrm>
+            <a:off x="7196328" y="1463040"/>
+            <a:ext cx="4553712" cy="433070"/>
+          </a:xfrm>
+          <a:prstGeom prst="rect">
+            <a:avLst/>
+          </a:prstGeom>
+          <a:noFill/>
+          <a:effectLst/>
+        </p:spPr>
+        <p:txBody>
+          <a:bodyPr wrap="none" lIns="18288" rIns="18288" tIns="18288" bIns="18288" anchor="t">
+            <a:spAutoFit/>
+          </a:bodyPr>
+          <a:lstStyle/>
+          <a:p>
+            <a:pPr algn="l">
+              <a:spcAft>
+                <a:spcPts val="0"/>
+              </a:spcAft>
+            </a:pPr>
+            <a:r>
+              <a:rPr sz="1250" b="0" i="0">
+                <a:solidFill>
+                  <a:srgbClr val="E7F0F3"/>
+                </a:solidFill>
+                <a:latin typeface="Arial"/>
+              </a:rPr>
+              <a:t>Axisymmetry: only r matters, the Laplacian 𝓛ᵣ replaces</a:t>
+            </a:r>
+          </a:p>
+          <a:p>
+            <a:pPr algn="l">
+              <a:spcAft>
+                <a:spcPts val="0"/>
+              </a:spcAft>
+            </a:pPr>
+            <a:r>
+              <a:rPr sz="1250" b="0" i="0">
+                <a:solidFill>
+                  <a:srgbClr val="E7F0F3"/>
+                </a:solidFill>
+                <a:latin typeface="Arial"/>
+              </a:rPr>
+              <a:t>∇².</a:t>
+            </a:r>
+          </a:p>
+        </p:txBody>
+      </p:sp>
+      <p:sp>
+        <p:nvSpPr>
+          <p:cNvPr id="20" name="C4-E13 ellipse 18" descr="sci-ppt:o018"/>
+          <p:cNvSpPr/>
+          <p:nvPr/>
+        </p:nvSpPr>
+        <p:spPr>
+          <a:xfrm>
+            <a:off x="7027164" y="1520317"/>
+            <a:ext cx="82296" cy="82296"/>
+          </a:xfrm>
+          <a:prstGeom prst="ellipse">
+            <a:avLst/>
+          </a:prstGeom>
+          <a:solidFill>
+            <a:srgbClr val="8EDBD4"/>
+          </a:solidFill>
+          <a:ln w="12700">
             <a:solidFill>
               <a:srgbClr val="8EDBD4"/>
             </a:solidFill>
           </a:ln>
           <a:effectLst/>
         </p:spPr>
-      </p:cxnSp>
-      <p:cxnSp>
-        <p:nvCxnSpPr>
-          <p:cNvPr id="11" name="C4-E13 line 9" descr="sci-ppt:o009"/>
-          <p:cNvCxnSpPr/>
+        <p:txBody>
+          <a:bodyPr rtlCol="0" anchor="ctr"/>
+          <a:lstStyle/>
+          <a:p>
+            <a:pPr algn="ctr"/>
+          </a:p>
+        </p:txBody>
+      </p:sp>
+      <p:sp>
+        <p:nvSpPr>
+          <p:cNvPr id="21" name="C4-E13 text 19" descr="sci-ppt:o019"/>
+          <p:cNvSpPr txBox="1"/>
           <p:nvPr/>
-        </p:nvCxnSpPr>
-        <p:spPr>
-          <a:xfrm flipV="1">
-            <a:off x="1541907" y="2678899"/>
-            <a:ext cx="76581" cy="42903"/>
-          </a:xfrm>
-          <a:prstGeom prst="line">
+        </p:nvSpPr>
+        <p:spPr>
+          <a:xfrm>
+            <a:off x="7196328" y="1941829"/>
+            <a:ext cx="4553712" cy="433070"/>
+          </a:xfrm>
+          <a:prstGeom prst="rect">
             <a:avLst/>
           </a:prstGeom>
-          <a:ln w="25400">
+          <a:noFill/>
+          <a:effectLst/>
+        </p:spPr>
+        <p:txBody>
+          <a:bodyPr wrap="none" lIns="18288" rIns="18288" tIns="18288" bIns="18288" anchor="t">
+            <a:spAutoFit/>
+          </a:bodyPr>
+          <a:lstStyle/>
+          <a:p>
+            <a:pPr algn="l">
+              <a:spcAft>
+                <a:spcPts val="0"/>
+              </a:spcAft>
+            </a:pPr>
+            <a:r>
+              <a:rPr sz="1250" b="0" i="0">
+                <a:solidFill>
+                  <a:srgbClr val="E7F0F3"/>
+                </a:solidFill>
+                <a:latin typeface="Arial"/>
+              </a:rPr>
+              <a:t>The biharmonic equation D_f ∇⁴w = p₀ becomes two</a:t>
+            </a:r>
+          </a:p>
+          <a:p>
+            <a:pPr algn="l">
+              <a:spcAft>
+                <a:spcPts val="0"/>
+              </a:spcAft>
+            </a:pPr>
+            <a:r>
+              <a:rPr sz="1250" b="0" i="0">
+                <a:solidFill>
+                  <a:srgbClr val="E7F0F3"/>
+                </a:solidFill>
+                <a:latin typeface="Arial"/>
+              </a:rPr>
+              <a:t>nested 𝓛ᵣ equations.</a:t>
+            </a:r>
+          </a:p>
+        </p:txBody>
+      </p:sp>
+      <p:sp>
+        <p:nvSpPr>
+          <p:cNvPr id="22" name="C4-E13 ellipse 20" descr="sci-ppt:o020"/>
+          <p:cNvSpPr/>
+          <p:nvPr/>
+        </p:nvSpPr>
+        <p:spPr>
+          <a:xfrm>
+            <a:off x="7027164" y="1999106"/>
+            <a:ext cx="82296" cy="82296"/>
+          </a:xfrm>
+          <a:prstGeom prst="ellipse">
+            <a:avLst/>
+          </a:prstGeom>
+          <a:solidFill>
+            <a:srgbClr val="8EDBD4"/>
+          </a:solidFill>
+          <a:ln w="12700">
             <a:solidFill>
               <a:srgbClr val="8EDBD4"/>
             </a:solidFill>
           </a:ln>
           <a:effectLst/>
         </p:spPr>
-      </p:cxnSp>
-      <p:cxnSp>
-        <p:nvCxnSpPr>
-          <p:cNvPr id="12" name="C4-E13 line 10" descr="sci-ppt:o010"/>
-          <p:cNvCxnSpPr/>
+        <p:txBody>
+          <a:bodyPr rtlCol="0" anchor="ctr"/>
+          <a:lstStyle/>
+          <a:p>
+            <a:pPr algn="ctr"/>
+          </a:p>
+        </p:txBody>
+      </p:sp>
+      <p:sp>
+        <p:nvSpPr>
+          <p:cNvPr id="23" name="C4-E13 text 21" descr="sci-ppt:o021"/>
+          <p:cNvSpPr txBox="1"/>
           <p:nvPr/>
-        </p:nvCxnSpPr>
-        <p:spPr>
-          <a:xfrm flipV="1">
-            <a:off x="1618488" y="2632419"/>
-            <a:ext cx="76581" cy="46480"/>
-          </a:xfrm>
-          <a:prstGeom prst="line">
+        </p:nvSpPr>
+        <p:spPr>
+          <a:xfrm>
+            <a:off x="7196328" y="2420619"/>
+            <a:ext cx="4553712" cy="433070"/>
+          </a:xfrm>
+          <a:prstGeom prst="rect">
             <a:avLst/>
           </a:prstGeom>
-          <a:ln w="25400">
+          <a:noFill/>
+          <a:effectLst/>
+        </p:spPr>
+        <p:txBody>
+          <a:bodyPr wrap="none" lIns="18288" rIns="18288" tIns="18288" bIns="18288" anchor="t">
+            <a:spAutoFit/>
+          </a:bodyPr>
+          <a:lstStyle/>
+          <a:p>
+            <a:pPr algn="l">
+              <a:spcAft>
+                <a:spcPts val="0"/>
+              </a:spcAft>
+            </a:pPr>
+            <a:r>
+              <a:rPr sz="1250" b="0" i="0">
+                <a:solidFill>
+                  <a:srgbClr val="E7F0F3"/>
+                </a:solidFill>
+                <a:latin typeface="Arial"/>
+              </a:rPr>
+              <a:t>Four constants must be fixed: two by regularity, two</a:t>
+            </a:r>
+          </a:p>
+          <a:p>
+            <a:pPr algn="l">
+              <a:spcAft>
+                <a:spcPts val="0"/>
+              </a:spcAft>
+            </a:pPr>
+            <a:r>
+              <a:rPr sz="1250" b="0" i="0">
+                <a:solidFill>
+                  <a:srgbClr val="E7F0F3"/>
+                </a:solidFill>
+                <a:latin typeface="Arial"/>
+              </a:rPr>
+              <a:t>by the clamp.</a:t>
+            </a:r>
+          </a:p>
+        </p:txBody>
+      </p:sp>
+      <p:sp>
+        <p:nvSpPr>
+          <p:cNvPr id="24" name="C4-E13 ellipse 22" descr="sci-ppt:o022"/>
+          <p:cNvSpPr/>
+          <p:nvPr/>
+        </p:nvSpPr>
+        <p:spPr>
+          <a:xfrm>
+            <a:off x="7027164" y="2477896"/>
+            <a:ext cx="82296" cy="82296"/>
+          </a:xfrm>
+          <a:prstGeom prst="ellipse">
+            <a:avLst/>
+          </a:prstGeom>
+          <a:solidFill>
+            <a:srgbClr val="8EDBD4"/>
+          </a:solidFill>
+          <a:ln w="12700">
             <a:solidFill>
               <a:srgbClr val="8EDBD4"/>
             </a:solidFill>
           </a:ln>
           <a:effectLst/>
         </p:spPr>
-      </p:cxnSp>
-      <p:cxnSp>
-        <p:nvCxnSpPr>
-          <p:cNvPr id="13" name="C4-E13 line 11" descr="sci-ppt:o011"/>
-          <p:cNvCxnSpPr/>
+        <p:txBody>
+          <a:bodyPr rtlCol="0" anchor="ctr"/>
+          <a:lstStyle/>
+          <a:p>
+            <a:pPr algn="ctr"/>
+          </a:p>
+        </p:txBody>
+      </p:sp>
+      <p:sp>
+        <p:nvSpPr>
+          <p:cNvPr id="25" name="C4-E13 text 23" descr="sci-ppt:o023"/>
+          <p:cNvSpPr txBox="1"/>
           <p:nvPr/>
-        </p:nvCxnSpPr>
-        <p:spPr>
-          <a:xfrm flipV="1">
-            <a:off x="1695069" y="2582822"/>
-            <a:ext cx="76581" cy="49597"/>
-          </a:xfrm>
-          <a:prstGeom prst="line">
+        </p:nvSpPr>
+        <p:spPr>
+          <a:xfrm>
+            <a:off x="7196328" y="2899409"/>
+            <a:ext cx="4553712" cy="433070"/>
+          </a:xfrm>
+          <a:prstGeom prst="rect">
             <a:avLst/>
           </a:prstGeom>
-          <a:ln w="25400">
+          <a:noFill/>
+          <a:effectLst/>
+        </p:spPr>
+        <p:txBody>
+          <a:bodyPr wrap="none" lIns="18288" rIns="18288" tIns="18288" bIns="18288" anchor="t">
+            <a:spAutoFit/>
+          </a:bodyPr>
+          <a:lstStyle/>
+          <a:p>
+            <a:pPr algn="l">
+              <a:spcAft>
+                <a:spcPts val="0"/>
+              </a:spcAft>
+            </a:pPr>
+            <a:r>
+              <a:rPr sz="1250" b="0" i="0">
+                <a:solidFill>
+                  <a:srgbClr val="E7F0F3"/>
+                </a:solidFill>
+                <a:latin typeface="Arial"/>
+              </a:rPr>
+              <a:t>Quasistatic: no inertia, so p₀ is applied slowly</a:t>
+            </a:r>
+          </a:p>
+          <a:p>
+            <a:pPr algn="l">
+              <a:spcAft>
+                <a:spcPts val="0"/>
+              </a:spcAft>
+            </a:pPr>
+            <a:r>
+              <a:rPr sz="1250" b="0" i="0">
+                <a:solidFill>
+                  <a:srgbClr val="E7F0F3"/>
+                </a:solidFill>
+                <a:latin typeface="Arial"/>
+              </a:rPr>
+              <a:t>(maintained pressure).</a:t>
+            </a:r>
+          </a:p>
+        </p:txBody>
+      </p:sp>
+      <p:sp>
+        <p:nvSpPr>
+          <p:cNvPr id="26" name="C4-E13 ellipse 24" descr="sci-ppt:o024"/>
+          <p:cNvSpPr/>
+          <p:nvPr/>
+        </p:nvSpPr>
+        <p:spPr>
+          <a:xfrm>
+            <a:off x="7027164" y="2956686"/>
+            <a:ext cx="82296" cy="82296"/>
+          </a:xfrm>
+          <a:prstGeom prst="ellipse">
+            <a:avLst/>
+          </a:prstGeom>
+          <a:solidFill>
+            <a:srgbClr val="8EDBD4"/>
+          </a:solidFill>
+          <a:ln w="12700">
             <a:solidFill>
               <a:srgbClr val="8EDBD4"/>
             </a:solidFill>
           </a:ln>
           <a:effectLst/>
         </p:spPr>
-      </p:cxnSp>
-      <p:cxnSp>
-        <p:nvCxnSpPr>
-          <p:cNvPr id="14" name="C4-E13 line 12" descr="sci-ppt:o012"/>
-          <p:cNvCxnSpPr/>
-          <p:nvPr/>
-        </p:nvCxnSpPr>
-        <p:spPr>
-          <a:xfrm flipV="1">
-            <a:off x="1771650" y="2530552"/>
-            <a:ext cx="76581" cy="52270"/>
-          </a:xfrm>
-          <a:prstGeom prst="line">
-            <a:avLst/>
-          </a:prstGeom>
-          <a:ln w="25400">
-            <a:solidFill>
-              <a:srgbClr val="8EDBD4"/>
-            </a:solidFill>
-          </a:ln>
-          <a:effectLst/>
-        </p:spPr>
-      </p:cxnSp>
-      <p:cxnSp>
-        <p:nvCxnSpPr>
-          <p:cNvPr id="15" name="C4-E13 line 13" descr="sci-ppt:o013"/>
-          <p:cNvCxnSpPr/>
-          <p:nvPr/>
-        </p:nvCxnSpPr>
-        <p:spPr>
-          <a:xfrm flipV="1">
-            <a:off x="1848231" y="2476039"/>
-            <a:ext cx="76581" cy="54513"/>
-          </a:xfrm>
-          <a:prstGeom prst="line">
-            <a:avLst/>
-          </a:prstGeom>
-          <a:ln w="25400">
-            <a:solidFill>
-              <a:srgbClr val="8EDBD4"/>
-            </a:solidFill>
-          </a:ln>
-          <a:effectLst/>
-        </p:spPr>
-      </p:cxnSp>
-      <p:cxnSp>
-        <p:nvCxnSpPr>
-          <p:cNvPr id="16" name="C4-E13 line 14" descr="sci-ppt:o014"/>
-          <p:cNvCxnSpPr/>
-          <p:nvPr/>
-        </p:nvCxnSpPr>
-        <p:spPr>
-          <a:xfrm flipV="1">
-            <a:off x="1924812" y="2419698"/>
-            <a:ext cx="76581" cy="56341"/>
-          </a:xfrm>
-          <a:prstGeom prst="line">
-            <a:avLst/>
-          </a:prstGeom>
-          <a:ln w="25400">
-            <a:solidFill>
-              <a:srgbClr val="8EDBD4"/>
-            </a:solidFill>
-          </a:ln>
-          <a:effectLst/>
-        </p:spPr>
-      </p:cxnSp>
-      <p:cxnSp>
-        <p:nvCxnSpPr>
-          <p:cNvPr id="17" name="C4-E13 line 15" descr="sci-ppt:o015"/>
-          <p:cNvCxnSpPr/>
-          <p:nvPr/>
-        </p:nvCxnSpPr>
-        <p:spPr>
-          <a:xfrm flipV="1">
-            <a:off x="2001393" y="2361931"/>
-            <a:ext cx="76581" cy="57767"/>
-          </a:xfrm>
-          <a:prstGeom prst="line">
-            <a:avLst/>
-          </a:prstGeom>
-          <a:ln w="25400">
-            <a:solidFill>
-              <a:srgbClr val="8EDBD4"/>
-            </a:solidFill>
-          </a:ln>
-          <a:effectLst/>
-        </p:spPr>
-      </p:cxnSp>
-      <p:cxnSp>
-        <p:nvCxnSpPr>
-          <p:cNvPr id="18" name="C4-E13 line 16" descr="sci-ppt:o016"/>
-          <p:cNvCxnSpPr/>
-          <p:nvPr/>
-        </p:nvCxnSpPr>
-        <p:spPr>
-          <a:xfrm flipV="1">
-            <a:off x="2077974" y="2303122"/>
-            <a:ext cx="76581" cy="58809"/>
-          </a:xfrm>
-          <a:prstGeom prst="line">
-            <a:avLst/>
-          </a:prstGeom>
-          <a:ln w="25400">
-            <a:solidFill>
-              <a:srgbClr val="8EDBD4"/>
-            </a:solidFill>
-          </a:ln>
-          <a:effectLst/>
-        </p:spPr>
-      </p:cxnSp>
-      <p:cxnSp>
-        <p:nvCxnSpPr>
-          <p:cNvPr id="19" name="C4-E13 line 17" descr="sci-ppt:o017"/>
-          <p:cNvCxnSpPr/>
-          <p:nvPr/>
-        </p:nvCxnSpPr>
-        <p:spPr>
-          <a:xfrm flipV="1">
-            <a:off x="2154555" y="2243644"/>
-            <a:ext cx="76581" cy="59478"/>
-          </a:xfrm>
-          <a:prstGeom prst="line">
-            <a:avLst/>
-          </a:prstGeom>
-          <a:ln w="25400">
-            <a:solidFill>
-              <a:srgbClr val="8EDBD4"/>
-            </a:solidFill>
-          </a:ln>
-          <a:effectLst/>
-        </p:spPr>
-      </p:cxnSp>
-      <p:cxnSp>
-        <p:nvCxnSpPr>
-          <p:cNvPr id="20" name="C4-E13 line 18" descr="sci-ppt:o018"/>
-          <p:cNvCxnSpPr/>
-          <p:nvPr/>
-        </p:nvCxnSpPr>
-        <p:spPr>
-          <a:xfrm flipV="1">
-            <a:off x="2231136" y="2183855"/>
-            <a:ext cx="76581" cy="59789"/>
-          </a:xfrm>
-          <a:prstGeom prst="line">
-            <a:avLst/>
-          </a:prstGeom>
-          <a:ln w="25400">
-            <a:solidFill>
-              <a:srgbClr val="8EDBD4"/>
-            </a:solidFill>
-          </a:ln>
-          <a:effectLst/>
-        </p:spPr>
-      </p:cxnSp>
-      <p:cxnSp>
-        <p:nvCxnSpPr>
-          <p:cNvPr id="21" name="C4-E13 line 19" descr="sci-ppt:o019"/>
-          <p:cNvCxnSpPr/>
-          <p:nvPr/>
-        </p:nvCxnSpPr>
-        <p:spPr>
-          <a:xfrm flipV="1">
-            <a:off x="2307717" y="2124095"/>
-            <a:ext cx="76581" cy="59760"/>
-          </a:xfrm>
-          <a:prstGeom prst="line">
-            <a:avLst/>
-          </a:prstGeom>
-          <a:ln w="25400">
-            <a:solidFill>
-              <a:srgbClr val="8EDBD4"/>
-            </a:solidFill>
-          </a:ln>
-          <a:effectLst/>
-        </p:spPr>
-      </p:cxnSp>
-      <p:cxnSp>
-        <p:nvCxnSpPr>
-          <p:cNvPr id="22" name="C4-E13 line 20" descr="sci-ppt:o020"/>
-          <p:cNvCxnSpPr/>
-          <p:nvPr/>
-        </p:nvCxnSpPr>
-        <p:spPr>
-          <a:xfrm flipV="1">
-            <a:off x="2384298" y="2064694"/>
-            <a:ext cx="76581" cy="59401"/>
-          </a:xfrm>
-          <a:prstGeom prst="line">
-            <a:avLst/>
-          </a:prstGeom>
-          <a:ln w="25400">
-            <a:solidFill>
-              <a:srgbClr val="8EDBD4"/>
-            </a:solidFill>
-          </a:ln>
-          <a:effectLst/>
-        </p:spPr>
-      </p:cxnSp>
-      <p:cxnSp>
-        <p:nvCxnSpPr>
-          <p:cNvPr id="23" name="C4-E13 line 21" descr="sci-ppt:o021"/>
-          <p:cNvCxnSpPr/>
-          <p:nvPr/>
-        </p:nvCxnSpPr>
-        <p:spPr>
-          <a:xfrm flipV="1">
-            <a:off x="2460879" y="2005965"/>
-            <a:ext cx="76581" cy="58729"/>
-          </a:xfrm>
-          <a:prstGeom prst="line">
-            <a:avLst/>
-          </a:prstGeom>
-          <a:ln w="25400">
-            <a:solidFill>
-              <a:srgbClr val="8EDBD4"/>
-            </a:solidFill>
-          </a:ln>
-          <a:effectLst/>
-        </p:spPr>
-      </p:cxnSp>
-      <p:cxnSp>
-        <p:nvCxnSpPr>
-          <p:cNvPr id="24" name="C4-E13 line 22" descr="sci-ppt:o022"/>
-          <p:cNvCxnSpPr/>
-          <p:nvPr/>
-        </p:nvCxnSpPr>
-        <p:spPr>
-          <a:xfrm flipV="1">
-            <a:off x="2537460" y="1948205"/>
-            <a:ext cx="76581" cy="57760"/>
-          </a:xfrm>
-          <a:prstGeom prst="line">
-            <a:avLst/>
-          </a:prstGeom>
-          <a:ln w="25400">
-            <a:solidFill>
-              <a:srgbClr val="8EDBD4"/>
-            </a:solidFill>
-          </a:ln>
-          <a:effectLst/>
-        </p:spPr>
-      </p:cxnSp>
-      <p:cxnSp>
-        <p:nvCxnSpPr>
-          <p:cNvPr id="25" name="C4-E13 line 23" descr="sci-ppt:o023"/>
-          <p:cNvCxnSpPr/>
-          <p:nvPr/>
-        </p:nvCxnSpPr>
-        <p:spPr>
-          <a:xfrm flipV="1">
-            <a:off x="2614041" y="1891701"/>
-            <a:ext cx="76581" cy="56504"/>
-          </a:xfrm>
-          <a:prstGeom prst="line">
-            <a:avLst/>
-          </a:prstGeom>
-          <a:ln w="25400">
-            <a:solidFill>
-              <a:srgbClr val="8EDBD4"/>
-            </a:solidFill>
-          </a:ln>
-          <a:effectLst/>
-        </p:spPr>
-      </p:cxnSp>
-      <p:cxnSp>
-        <p:nvCxnSpPr>
-          <p:cNvPr id="26" name="C4-E13 line 24" descr="sci-ppt:o024"/>
-          <p:cNvCxnSpPr/>
-          <p:nvPr/>
-        </p:nvCxnSpPr>
-        <p:spPr>
-          <a:xfrm flipV="1">
-            <a:off x="2690622" y="1836720"/>
-            <a:ext cx="76581" cy="54981"/>
-          </a:xfrm>
-          <a:prstGeom prst="line">
-            <a:avLst/>
-          </a:prstGeom>
-          <a:ln w="25400">
-            <a:solidFill>
-              <a:srgbClr val="8EDBD4"/>
-            </a:solidFill>
-          </a:ln>
-          <a:effectLst/>
-        </p:spPr>
-      </p:cxnSp>
-      <p:cxnSp>
-        <p:nvCxnSpPr>
-          <p:cNvPr id="27" name="C4-E13 line 25" descr="sci-ppt:o025"/>
-          <p:cNvCxnSpPr/>
-          <p:nvPr/>
-        </p:nvCxnSpPr>
-        <p:spPr>
-          <a:xfrm flipV="1">
-            <a:off x="2767203" y="1783518"/>
-            <a:ext cx="76581" cy="53202"/>
-          </a:xfrm>
-          <a:prstGeom prst="line">
-            <a:avLst/>
-          </a:prstGeom>
-          <a:ln w="25400">
-            <a:solidFill>
-              <a:srgbClr val="8EDBD4"/>
-            </a:solidFill>
-          </a:ln>
-          <a:effectLst/>
-        </p:spPr>
-      </p:cxnSp>
-      <p:cxnSp>
-        <p:nvCxnSpPr>
-          <p:cNvPr id="28" name="C4-E13 line 26" descr="sci-ppt:o026"/>
-          <p:cNvCxnSpPr/>
-          <p:nvPr/>
-        </p:nvCxnSpPr>
-        <p:spPr>
-          <a:xfrm flipV="1">
-            <a:off x="2843784" y="1732337"/>
-            <a:ext cx="76581" cy="51181"/>
-          </a:xfrm>
-          <a:prstGeom prst="line">
-            <a:avLst/>
-          </a:prstGeom>
-          <a:ln w="25400">
-            <a:solidFill>
-              <a:srgbClr val="8EDBD4"/>
-            </a:solidFill>
-          </a:ln>
-          <a:effectLst/>
-        </p:spPr>
-      </p:cxnSp>
-      <p:cxnSp>
-        <p:nvCxnSpPr>
-          <p:cNvPr id="29" name="C4-E13 line 27" descr="sci-ppt:o027"/>
-          <p:cNvCxnSpPr/>
-          <p:nvPr/>
-        </p:nvCxnSpPr>
-        <p:spPr>
-          <a:xfrm flipV="1">
-            <a:off x="2920365" y="1683400"/>
-            <a:ext cx="76581" cy="48937"/>
-          </a:xfrm>
-          <a:prstGeom prst="line">
-            <a:avLst/>
-          </a:prstGeom>
-          <a:ln w="25400">
-            <a:solidFill>
-              <a:srgbClr val="8EDBD4"/>
-            </a:solidFill>
-          </a:ln>
-          <a:effectLst/>
-        </p:spPr>
-      </p:cxnSp>
-      <p:cxnSp>
-        <p:nvCxnSpPr>
-          <p:cNvPr id="30" name="C4-E13 line 28" descr="sci-ppt:o028"/>
-          <p:cNvCxnSpPr/>
-          <p:nvPr/>
-        </p:nvCxnSpPr>
-        <p:spPr>
-          <a:xfrm flipV="1">
-            <a:off x="2996946" y="1636921"/>
-            <a:ext cx="76581" cy="46479"/>
-          </a:xfrm>
-          <a:prstGeom prst="line">
-            <a:avLst/>
-          </a:prstGeom>
-          <a:ln w="25400">
-            <a:solidFill>
-              <a:srgbClr val="8EDBD4"/>
-            </a:solidFill>
-          </a:ln>
-          <a:effectLst/>
-        </p:spPr>
-      </p:cxnSp>
-      <p:cxnSp>
-        <p:nvCxnSpPr>
-          <p:cNvPr id="31" name="C4-E13 line 29" descr="sci-ppt:o029"/>
-          <p:cNvCxnSpPr/>
-          <p:nvPr/>
-        </p:nvCxnSpPr>
-        <p:spPr>
-          <a:xfrm flipV="1">
-            <a:off x="3073527" y="1593095"/>
-            <a:ext cx="76581" cy="43826"/>
-          </a:xfrm>
-          <a:prstGeom prst="line">
-            <a:avLst/>
-          </a:prstGeom>
-          <a:ln w="25400">
-            <a:solidFill>
-              <a:srgbClr val="8EDBD4"/>
-            </a:solidFill>
-          </a:ln>
-          <a:effectLst/>
-        </p:spPr>
-      </p:cxnSp>
-      <p:cxnSp>
-        <p:nvCxnSpPr>
-          <p:cNvPr id="32" name="C4-E13 line 30" descr="sci-ppt:o030"/>
-          <p:cNvCxnSpPr/>
-          <p:nvPr/>
-        </p:nvCxnSpPr>
-        <p:spPr>
-          <a:xfrm flipV="1">
-            <a:off x="3150108" y="1552104"/>
-            <a:ext cx="76581" cy="40991"/>
-          </a:xfrm>
-          <a:prstGeom prst="line">
-            <a:avLst/>
-          </a:prstGeom>
-          <a:ln w="25400">
-            <a:solidFill>
-              <a:srgbClr val="8EDBD4"/>
-            </a:solidFill>
-          </a:ln>
-          <a:effectLst/>
-        </p:spPr>
-      </p:cxnSp>
-      <p:cxnSp>
-        <p:nvCxnSpPr>
-          <p:cNvPr id="33" name="C4-E13 line 31" descr="sci-ppt:o031"/>
-          <p:cNvCxnSpPr/>
-          <p:nvPr/>
-        </p:nvCxnSpPr>
-        <p:spPr>
-          <a:xfrm flipV="1">
-            <a:off x="3226689" y="1514117"/>
-            <a:ext cx="76581" cy="37987"/>
-          </a:xfrm>
-          <a:prstGeom prst="line">
-            <a:avLst/>
-          </a:prstGeom>
-          <a:ln w="25400">
-            <a:solidFill>
-              <a:srgbClr val="8EDBD4"/>
-            </a:solidFill>
-          </a:ln>
-          <a:effectLst/>
-        </p:spPr>
-      </p:cxnSp>
-      <p:cxnSp>
-        <p:nvCxnSpPr>
-          <p:cNvPr id="34" name="C4-E13 line 32" descr="sci-ppt:o032"/>
-          <p:cNvCxnSpPr/>
-          <p:nvPr/>
-        </p:nvCxnSpPr>
-        <p:spPr>
-          <a:xfrm flipV="1">
-            <a:off x="3303270" y="1479287"/>
-            <a:ext cx="76581" cy="34830"/>
-          </a:xfrm>
-          <a:prstGeom prst="line">
-            <a:avLst/>
-          </a:prstGeom>
-          <a:ln w="25400">
-            <a:solidFill>
-              <a:srgbClr val="8EDBD4"/>
-            </a:solidFill>
-          </a:ln>
-          <a:effectLst/>
-        </p:spPr>
-      </p:cxnSp>
-      <p:cxnSp>
-        <p:nvCxnSpPr>
-          <p:cNvPr id="35" name="C4-E13 line 33" descr="sci-ppt:o033"/>
-          <p:cNvCxnSpPr/>
-          <p:nvPr/>
-        </p:nvCxnSpPr>
-        <p:spPr>
-          <a:xfrm flipV="1">
-            <a:off x="3379851" y="1447751"/>
-            <a:ext cx="76581" cy="31536"/>
-          </a:xfrm>
-          <a:prstGeom prst="line">
-            <a:avLst/>
-          </a:prstGeom>
-          <a:ln w="25400">
-            <a:solidFill>
-              <a:srgbClr val="8EDBD4"/>
-            </a:solidFill>
-          </a:ln>
-          <a:effectLst/>
-        </p:spPr>
-      </p:cxnSp>
-      <p:cxnSp>
-        <p:nvCxnSpPr>
-          <p:cNvPr id="36" name="C4-E13 line 34" descr="sci-ppt:o034"/>
-          <p:cNvCxnSpPr/>
-          <p:nvPr/>
-        </p:nvCxnSpPr>
-        <p:spPr>
-          <a:xfrm flipV="1">
-            <a:off x="3456432" y="1419633"/>
-            <a:ext cx="76581" cy="28118"/>
-          </a:xfrm>
-          <a:prstGeom prst="line">
-            <a:avLst/>
-          </a:prstGeom>
-          <a:ln w="25400">
-            <a:solidFill>
-              <a:srgbClr val="8EDBD4"/>
-            </a:solidFill>
-          </a:ln>
-          <a:effectLst/>
-        </p:spPr>
-      </p:cxnSp>
-      <p:cxnSp>
-        <p:nvCxnSpPr>
-          <p:cNvPr id="37" name="C4-E13 line 35" descr="sci-ppt:o035"/>
-          <p:cNvCxnSpPr/>
-          <p:nvPr/>
-        </p:nvCxnSpPr>
-        <p:spPr>
-          <a:xfrm flipV="1">
-            <a:off x="3533013" y="1395044"/>
-            <a:ext cx="76581" cy="24589"/>
-          </a:xfrm>
-          <a:prstGeom prst="line">
-            <a:avLst/>
-          </a:prstGeom>
-          <a:ln w="25400">
-            <a:solidFill>
-              <a:srgbClr val="8EDBD4"/>
-            </a:solidFill>
-          </a:ln>
-          <a:effectLst/>
-        </p:spPr>
-      </p:cxnSp>
-      <p:cxnSp>
-        <p:nvCxnSpPr>
-          <p:cNvPr id="38" name="C4-E13 line 36" descr="sci-ppt:o036"/>
-          <p:cNvCxnSpPr/>
-          <p:nvPr/>
-        </p:nvCxnSpPr>
-        <p:spPr>
-          <a:xfrm flipV="1">
-            <a:off x="3609594" y="1374077"/>
-            <a:ext cx="76581" cy="20967"/>
-          </a:xfrm>
-          <a:prstGeom prst="line">
-            <a:avLst/>
-          </a:prstGeom>
-          <a:ln w="25400">
-            <a:solidFill>
-              <a:srgbClr val="8EDBD4"/>
-            </a:solidFill>
-          </a:ln>
-          <a:effectLst/>
-        </p:spPr>
-      </p:cxnSp>
-      <p:cxnSp>
-        <p:nvCxnSpPr>
-          <p:cNvPr id="39" name="C4-E13 line 37" descr="sci-ppt:o037"/>
-          <p:cNvCxnSpPr/>
-          <p:nvPr/>
-        </p:nvCxnSpPr>
-        <p:spPr>
-          <a:xfrm flipV="1">
-            <a:off x="3686175" y="1356814"/>
-            <a:ext cx="76581" cy="17263"/>
-          </a:xfrm>
-          <a:prstGeom prst="line">
-            <a:avLst/>
-          </a:prstGeom>
-          <a:ln w="25400">
-            <a:solidFill>
-              <a:srgbClr val="8EDBD4"/>
-            </a:solidFill>
-          </a:ln>
-          <a:effectLst/>
-        </p:spPr>
-      </p:cxnSp>
-      <p:cxnSp>
-        <p:nvCxnSpPr>
-          <p:cNvPr id="40" name="C4-E13 line 38" descr="sci-ppt:o038"/>
-          <p:cNvCxnSpPr/>
-          <p:nvPr/>
-        </p:nvCxnSpPr>
-        <p:spPr>
-          <a:xfrm flipV="1">
-            <a:off x="3762756" y="1343318"/>
-            <a:ext cx="76581" cy="13496"/>
-          </a:xfrm>
-          <a:prstGeom prst="line">
-            <a:avLst/>
-          </a:prstGeom>
-          <a:ln w="25400">
-            <a:solidFill>
-              <a:srgbClr val="8EDBD4"/>
-            </a:solidFill>
-          </a:ln>
-          <a:effectLst/>
-        </p:spPr>
-      </p:cxnSp>
-      <p:cxnSp>
-        <p:nvCxnSpPr>
-          <p:cNvPr id="41" name="C4-E13 line 39" descr="sci-ppt:o039"/>
-          <p:cNvCxnSpPr/>
-          <p:nvPr/>
-        </p:nvCxnSpPr>
-        <p:spPr>
-          <a:xfrm flipV="1">
-            <a:off x="3839337" y="1333642"/>
-            <a:ext cx="76581" cy="9676"/>
-          </a:xfrm>
-          <a:prstGeom prst="line">
-            <a:avLst/>
-          </a:prstGeom>
-          <a:ln w="25400">
-            <a:solidFill>
-              <a:srgbClr val="8EDBD4"/>
-            </a:solidFill>
-          </a:ln>
-          <a:effectLst/>
-        </p:spPr>
-      </p:cxnSp>
-      <p:cxnSp>
-        <p:nvCxnSpPr>
-          <p:cNvPr id="42" name="C4-E13 line 40" descr="sci-ppt:o040"/>
-          <p:cNvCxnSpPr/>
-          <p:nvPr/>
-        </p:nvCxnSpPr>
-        <p:spPr>
-          <a:xfrm flipV="1">
-            <a:off x="3915918" y="1327822"/>
-            <a:ext cx="76581" cy="5820"/>
-          </a:xfrm>
-          <a:prstGeom prst="line">
-            <a:avLst/>
-          </a:prstGeom>
-          <a:ln w="25400">
-            <a:solidFill>
-              <a:srgbClr val="8EDBD4"/>
-            </a:solidFill>
-          </a:ln>
-          <a:effectLst/>
-        </p:spPr>
-      </p:cxnSp>
-      <p:cxnSp>
-        <p:nvCxnSpPr>
-          <p:cNvPr id="43" name="C4-E13 line 41" descr="sci-ppt:o041"/>
-          <p:cNvCxnSpPr/>
-          <p:nvPr/>
-        </p:nvCxnSpPr>
-        <p:spPr>
-          <a:xfrm flipV="1">
-            <a:off x="3992499" y="1325880"/>
-            <a:ext cx="76581" cy="1942"/>
-          </a:xfrm>
-          <a:prstGeom prst="line">
-            <a:avLst/>
-          </a:prstGeom>
-          <a:ln w="25400">
-            <a:solidFill>
-              <a:srgbClr val="8EDBD4"/>
-            </a:solidFill>
-          </a:ln>
-          <a:effectLst/>
-        </p:spPr>
-      </p:cxnSp>
-      <p:cxnSp>
-        <p:nvCxnSpPr>
-          <p:cNvPr id="44" name="C4-E13 line 42" descr="sci-ppt:o042"/>
-          <p:cNvCxnSpPr/>
-          <p:nvPr/>
-        </p:nvCxnSpPr>
-        <p:spPr>
-          <a:xfrm>
-            <a:off x="4069080" y="1325880"/>
-            <a:ext cx="76580" cy="1942"/>
-          </a:xfrm>
-          <a:prstGeom prst="line">
-            <a:avLst/>
-          </a:prstGeom>
-          <a:ln w="25400">
-            <a:solidFill>
-              <a:srgbClr val="8EDBD4"/>
-            </a:solidFill>
-          </a:ln>
-          <a:effectLst/>
-        </p:spPr>
-      </p:cxnSp>
-      <p:cxnSp>
-        <p:nvCxnSpPr>
-          <p:cNvPr id="45" name="C4-E13 line 43" descr="sci-ppt:o043"/>
-          <p:cNvCxnSpPr/>
-          <p:nvPr/>
-        </p:nvCxnSpPr>
-        <p:spPr>
-          <a:xfrm>
-            <a:off x="4145660" y="1327822"/>
-            <a:ext cx="76582" cy="5820"/>
-          </a:xfrm>
-          <a:prstGeom prst="line">
-            <a:avLst/>
-          </a:prstGeom>
-          <a:ln w="25400">
-            <a:solidFill>
-              <a:srgbClr val="8EDBD4"/>
-            </a:solidFill>
-          </a:ln>
-          <a:effectLst/>
-        </p:spPr>
-      </p:cxnSp>
-      <p:cxnSp>
-        <p:nvCxnSpPr>
-          <p:cNvPr id="46" name="C4-E13 line 44" descr="sci-ppt:o044"/>
-          <p:cNvCxnSpPr/>
-          <p:nvPr/>
-        </p:nvCxnSpPr>
-        <p:spPr>
-          <a:xfrm>
-            <a:off x="4222242" y="1333642"/>
-            <a:ext cx="76581" cy="9676"/>
-          </a:xfrm>
-          <a:prstGeom prst="line">
-            <a:avLst/>
-          </a:prstGeom>
-          <a:ln w="25400">
-            <a:solidFill>
-              <a:srgbClr val="8EDBD4"/>
-            </a:solidFill>
-          </a:ln>
-          <a:effectLst/>
-        </p:spPr>
-      </p:cxnSp>
-      <p:cxnSp>
-        <p:nvCxnSpPr>
-          <p:cNvPr id="47" name="C4-E13 line 45" descr="sci-ppt:o045"/>
-          <p:cNvCxnSpPr/>
-          <p:nvPr/>
-        </p:nvCxnSpPr>
-        <p:spPr>
-          <a:xfrm>
-            <a:off x="4298823" y="1343318"/>
-            <a:ext cx="76581" cy="13496"/>
-          </a:xfrm>
-          <a:prstGeom prst="line">
-            <a:avLst/>
-          </a:prstGeom>
-          <a:ln w="25400">
-            <a:solidFill>
-              <a:srgbClr val="8EDBD4"/>
-            </a:solidFill>
-          </a:ln>
-          <a:effectLst/>
-        </p:spPr>
-      </p:cxnSp>
-      <p:cxnSp>
-        <p:nvCxnSpPr>
-          <p:cNvPr id="48" name="C4-E13 line 46" descr="sci-ppt:o046"/>
-          <p:cNvCxnSpPr/>
-          <p:nvPr/>
-        </p:nvCxnSpPr>
-        <p:spPr>
-          <a:xfrm>
-            <a:off x="4375404" y="1356814"/>
-            <a:ext cx="76581" cy="17263"/>
-          </a:xfrm>
-          <a:prstGeom prst="line">
-            <a:avLst/>
-          </a:prstGeom>
-          <a:ln w="25400">
-            <a:solidFill>
-              <a:srgbClr val="8EDBD4"/>
-            </a:solidFill>
-          </a:ln>
-          <a:effectLst/>
-        </p:spPr>
-      </p:cxnSp>
-      <p:cxnSp>
-        <p:nvCxnSpPr>
-          <p:cNvPr id="49" name="C4-E13 line 47" descr="sci-ppt:o047"/>
-          <p:cNvCxnSpPr/>
-          <p:nvPr/>
-        </p:nvCxnSpPr>
-        <p:spPr>
-          <a:xfrm>
-            <a:off x="4451985" y="1374077"/>
-            <a:ext cx="76581" cy="20967"/>
-          </a:xfrm>
-          <a:prstGeom prst="line">
-            <a:avLst/>
-          </a:prstGeom>
-          <a:ln w="25400">
-            <a:solidFill>
-              <a:srgbClr val="8EDBD4"/>
-            </a:solidFill>
-          </a:ln>
-          <a:effectLst/>
-        </p:spPr>
-      </p:cxnSp>
-      <p:cxnSp>
-        <p:nvCxnSpPr>
-          <p:cNvPr id="50" name="C4-E13 line 48" descr="sci-ppt:o048"/>
-          <p:cNvCxnSpPr/>
-          <p:nvPr/>
-        </p:nvCxnSpPr>
-        <p:spPr>
-          <a:xfrm>
-            <a:off x="4528566" y="1395044"/>
-            <a:ext cx="76581" cy="24589"/>
-          </a:xfrm>
-          <a:prstGeom prst="line">
-            <a:avLst/>
-          </a:prstGeom>
-          <a:ln w="25400">
-            <a:solidFill>
-              <a:srgbClr val="8EDBD4"/>
-            </a:solidFill>
-          </a:ln>
-          <a:effectLst/>
-        </p:spPr>
-      </p:cxnSp>
-      <p:cxnSp>
-        <p:nvCxnSpPr>
-          <p:cNvPr id="51" name="C4-E13 line 49" descr="sci-ppt:o049"/>
-          <p:cNvCxnSpPr/>
-          <p:nvPr/>
-        </p:nvCxnSpPr>
-        <p:spPr>
-          <a:xfrm>
-            <a:off x="4605147" y="1419633"/>
-            <a:ext cx="76581" cy="28118"/>
-          </a:xfrm>
-          <a:prstGeom prst="line">
-            <a:avLst/>
-          </a:prstGeom>
-          <a:ln w="25400">
-            <a:solidFill>
-              <a:srgbClr val="8EDBD4"/>
-            </a:solidFill>
-          </a:ln>
-          <a:effectLst/>
-        </p:spPr>
-      </p:cxnSp>
-      <p:cxnSp>
-        <p:nvCxnSpPr>
-          <p:cNvPr id="52" name="C4-E13 line 50" descr="sci-ppt:o050"/>
-          <p:cNvCxnSpPr/>
-          <p:nvPr/>
-        </p:nvCxnSpPr>
-        <p:spPr>
-          <a:xfrm>
-            <a:off x="4681728" y="1447751"/>
-            <a:ext cx="76580" cy="31536"/>
-          </a:xfrm>
-          <a:prstGeom prst="line">
-            <a:avLst/>
-          </a:prstGeom>
-          <a:ln w="25400">
-            <a:solidFill>
-              <a:srgbClr val="8EDBD4"/>
-            </a:solidFill>
-          </a:ln>
-          <a:effectLst/>
-        </p:spPr>
-      </p:cxnSp>
-      <p:cxnSp>
-        <p:nvCxnSpPr>
-          <p:cNvPr id="53" name="C4-E13 line 51" descr="sci-ppt:o051"/>
-          <p:cNvCxnSpPr/>
-          <p:nvPr/>
-        </p:nvCxnSpPr>
-        <p:spPr>
-          <a:xfrm>
-            <a:off x="4758308" y="1479287"/>
-            <a:ext cx="76582" cy="34830"/>
-          </a:xfrm>
-          <a:prstGeom prst="line">
-            <a:avLst/>
-          </a:prstGeom>
-          <a:ln w="25400">
-            <a:solidFill>
-              <a:srgbClr val="8EDBD4"/>
-            </a:solidFill>
-          </a:ln>
-          <a:effectLst/>
-        </p:spPr>
-      </p:cxnSp>
-      <p:cxnSp>
-        <p:nvCxnSpPr>
-          <p:cNvPr id="54" name="C4-E13 line 52" descr="sci-ppt:o052"/>
-          <p:cNvCxnSpPr/>
-          <p:nvPr/>
-        </p:nvCxnSpPr>
-        <p:spPr>
-          <a:xfrm>
-            <a:off x="4834890" y="1514117"/>
-            <a:ext cx="76581" cy="37987"/>
-          </a:xfrm>
-          <a:prstGeom prst="line">
-            <a:avLst/>
-          </a:prstGeom>
-          <a:ln w="25400">
-            <a:solidFill>
-              <a:srgbClr val="8EDBD4"/>
-            </a:solidFill>
-          </a:ln>
-          <a:effectLst/>
-        </p:spPr>
-      </p:cxnSp>
-      <p:cxnSp>
-        <p:nvCxnSpPr>
-          <p:cNvPr id="55" name="C4-E13 line 53" descr="sci-ppt:o053"/>
-          <p:cNvCxnSpPr/>
-          <p:nvPr/>
-        </p:nvCxnSpPr>
-        <p:spPr>
-          <a:xfrm>
-            <a:off x="4911471" y="1552104"/>
-            <a:ext cx="76581" cy="40991"/>
-          </a:xfrm>
-          <a:prstGeom prst="line">
-            <a:avLst/>
-          </a:prstGeom>
-          <a:ln w="25400">
-            <a:solidFill>
-              <a:srgbClr val="8EDBD4"/>
-            </a:solidFill>
-          </a:ln>
-          <a:effectLst/>
-        </p:spPr>
-      </p:cxnSp>
-      <p:cxnSp>
-        <p:nvCxnSpPr>
-          <p:cNvPr id="56" name="C4-E13 line 54" descr="sci-ppt:o054"/>
-          <p:cNvCxnSpPr/>
-          <p:nvPr/>
-        </p:nvCxnSpPr>
-        <p:spPr>
-          <a:xfrm>
-            <a:off x="4988052" y="1593095"/>
-            <a:ext cx="76581" cy="43826"/>
-          </a:xfrm>
-          <a:prstGeom prst="line">
-            <a:avLst/>
-          </a:prstGeom>
-          <a:ln w="25400">
-            <a:solidFill>
-              <a:srgbClr val="8EDBD4"/>
-            </a:solidFill>
-          </a:ln>
-          <a:effectLst/>
-        </p:spPr>
-      </p:cxnSp>
-      <p:cxnSp>
-        <p:nvCxnSpPr>
-          <p:cNvPr id="57" name="C4-E13 line 55" descr="sci-ppt:o055"/>
-          <p:cNvCxnSpPr/>
-          <p:nvPr/>
-        </p:nvCxnSpPr>
-        <p:spPr>
-          <a:xfrm>
-            <a:off x="5064633" y="1636921"/>
-            <a:ext cx="76581" cy="46479"/>
-          </a:xfrm>
-          <a:prstGeom prst="line">
-            <a:avLst/>
-          </a:prstGeom>
-          <a:ln w="25400">
-            <a:solidFill>
-              <a:srgbClr val="8EDBD4"/>
-            </a:solidFill>
-          </a:ln>
-          <a:effectLst/>
-        </p:spPr>
-      </p:cxnSp>
-      <p:cxnSp>
-        <p:nvCxnSpPr>
-          <p:cNvPr id="58" name="C4-E13 line 56" descr="sci-ppt:o056"/>
-          <p:cNvCxnSpPr/>
-          <p:nvPr/>
-        </p:nvCxnSpPr>
-        <p:spPr>
-          <a:xfrm>
-            <a:off x="5141214" y="1683400"/>
-            <a:ext cx="76581" cy="48937"/>
-          </a:xfrm>
-          <a:prstGeom prst="line">
-            <a:avLst/>
-          </a:prstGeom>
-          <a:ln w="25400">
-            <a:solidFill>
-              <a:srgbClr val="8EDBD4"/>
-            </a:solidFill>
-          </a:ln>
-          <a:effectLst/>
-        </p:spPr>
-      </p:cxnSp>
-      <p:cxnSp>
-        <p:nvCxnSpPr>
-          <p:cNvPr id="59" name="C4-E13 line 57" descr="sci-ppt:o057"/>
-          <p:cNvCxnSpPr/>
-          <p:nvPr/>
-        </p:nvCxnSpPr>
-        <p:spPr>
-          <a:xfrm>
-            <a:off x="5217795" y="1732337"/>
-            <a:ext cx="76580" cy="51181"/>
-          </a:xfrm>
-          <a:prstGeom prst="line">
-            <a:avLst/>
-          </a:prstGeom>
-          <a:ln w="25400">
-            <a:solidFill>
-              <a:srgbClr val="8EDBD4"/>
-            </a:solidFill>
-          </a:ln>
-          <a:effectLst/>
-        </p:spPr>
-      </p:cxnSp>
-      <p:cxnSp>
-        <p:nvCxnSpPr>
-          <p:cNvPr id="60" name="C4-E13 line 58" descr="sci-ppt:o058"/>
-          <p:cNvCxnSpPr/>
-          <p:nvPr/>
-        </p:nvCxnSpPr>
-        <p:spPr>
-          <a:xfrm>
-            <a:off x="5294375" y="1783518"/>
-            <a:ext cx="76582" cy="53202"/>
-          </a:xfrm>
-          <a:prstGeom prst="line">
-            <a:avLst/>
-          </a:prstGeom>
-          <a:ln w="25400">
-            <a:solidFill>
-              <a:srgbClr val="8EDBD4"/>
-            </a:solidFill>
-          </a:ln>
-          <a:effectLst/>
-        </p:spPr>
-      </p:cxnSp>
-      <p:cxnSp>
-        <p:nvCxnSpPr>
-          <p:cNvPr id="61" name="C4-E13 line 59" descr="sci-ppt:o059"/>
-          <p:cNvCxnSpPr/>
-          <p:nvPr/>
-        </p:nvCxnSpPr>
-        <p:spPr>
-          <a:xfrm>
-            <a:off x="5370957" y="1836720"/>
-            <a:ext cx="76581" cy="54981"/>
-          </a:xfrm>
-          <a:prstGeom prst="line">
-            <a:avLst/>
-          </a:prstGeom>
-          <a:ln w="25400">
-            <a:solidFill>
-              <a:srgbClr val="8EDBD4"/>
-            </a:solidFill>
-          </a:ln>
-          <a:effectLst/>
-        </p:spPr>
-      </p:cxnSp>
-      <p:cxnSp>
-        <p:nvCxnSpPr>
-          <p:cNvPr id="62" name="C4-E13 line 60" descr="sci-ppt:o060"/>
-          <p:cNvCxnSpPr/>
-          <p:nvPr/>
-        </p:nvCxnSpPr>
-        <p:spPr>
-          <a:xfrm>
-            <a:off x="5447538" y="1891701"/>
-            <a:ext cx="76581" cy="56504"/>
-          </a:xfrm>
-          <a:prstGeom prst="line">
-            <a:avLst/>
-          </a:prstGeom>
-          <a:ln w="25400">
-            <a:solidFill>
-              <a:srgbClr val="8EDBD4"/>
-            </a:solidFill>
-          </a:ln>
-          <a:effectLst/>
-        </p:spPr>
-      </p:cxnSp>
-      <p:cxnSp>
-        <p:nvCxnSpPr>
-          <p:cNvPr id="63" name="C4-E13 line 61" descr="sci-ppt:o061"/>
-          <p:cNvCxnSpPr/>
-          <p:nvPr/>
-        </p:nvCxnSpPr>
-        <p:spPr>
-          <a:xfrm>
-            <a:off x="5524119" y="1948205"/>
-            <a:ext cx="76581" cy="57760"/>
-          </a:xfrm>
-          <a:prstGeom prst="line">
-            <a:avLst/>
-          </a:prstGeom>
-          <a:ln w="25400">
-            <a:solidFill>
-              <a:srgbClr val="8EDBD4"/>
-            </a:solidFill>
-          </a:ln>
-          <a:effectLst/>
-        </p:spPr>
-      </p:cxnSp>
-      <p:cxnSp>
-        <p:nvCxnSpPr>
-          <p:cNvPr id="64" name="C4-E13 line 62" descr="sci-ppt:o062"/>
-          <p:cNvCxnSpPr/>
-          <p:nvPr/>
-        </p:nvCxnSpPr>
-        <p:spPr>
-          <a:xfrm>
-            <a:off x="5600700" y="2005965"/>
-            <a:ext cx="76581" cy="58729"/>
-          </a:xfrm>
-          <a:prstGeom prst="line">
-            <a:avLst/>
-          </a:prstGeom>
-          <a:ln w="25400">
-            <a:solidFill>
-              <a:srgbClr val="8EDBD4"/>
-            </a:solidFill>
-          </a:ln>
-          <a:effectLst/>
-        </p:spPr>
-      </p:cxnSp>
-      <p:cxnSp>
-        <p:nvCxnSpPr>
-          <p:cNvPr id="65" name="C4-E13 line 63" descr="sci-ppt:o063"/>
-          <p:cNvCxnSpPr/>
-          <p:nvPr/>
-        </p:nvCxnSpPr>
-        <p:spPr>
-          <a:xfrm>
-            <a:off x="5677281" y="2064694"/>
-            <a:ext cx="76581" cy="59401"/>
-          </a:xfrm>
-          <a:prstGeom prst="line">
-            <a:avLst/>
-          </a:prstGeom>
-          <a:ln w="25400">
-            <a:solidFill>
-              <a:srgbClr val="8EDBD4"/>
-            </a:solidFill>
-          </a:ln>
-          <a:effectLst/>
-        </p:spPr>
-      </p:cxnSp>
-      <p:cxnSp>
-        <p:nvCxnSpPr>
-          <p:cNvPr id="66" name="C4-E13 line 64" descr="sci-ppt:o064"/>
-          <p:cNvCxnSpPr/>
-          <p:nvPr/>
-        </p:nvCxnSpPr>
-        <p:spPr>
-          <a:xfrm>
-            <a:off x="5753862" y="2124095"/>
-            <a:ext cx="76581" cy="59760"/>
-          </a:xfrm>
-          <a:prstGeom prst="line">
-            <a:avLst/>
-          </a:prstGeom>
-          <a:ln w="25400">
-            <a:solidFill>
-              <a:srgbClr val="8EDBD4"/>
-            </a:solidFill>
-          </a:ln>
-          <a:effectLst/>
-        </p:spPr>
-      </p:cxnSp>
-      <p:cxnSp>
-        <p:nvCxnSpPr>
-          <p:cNvPr id="67" name="C4-E13 line 65" descr="sci-ppt:o065"/>
-          <p:cNvCxnSpPr/>
-          <p:nvPr/>
-        </p:nvCxnSpPr>
-        <p:spPr>
-          <a:xfrm>
-            <a:off x="5830443" y="2183855"/>
-            <a:ext cx="76581" cy="59789"/>
-          </a:xfrm>
-          <a:prstGeom prst="line">
-            <a:avLst/>
-          </a:prstGeom>
-          <a:ln w="25400">
-            <a:solidFill>
-              <a:srgbClr val="8EDBD4"/>
-            </a:solidFill>
-          </a:ln>
-          <a:effectLst/>
-        </p:spPr>
-      </p:cxnSp>
-      <p:cxnSp>
-        <p:nvCxnSpPr>
-          <p:cNvPr id="68" name="C4-E13 line 66" descr="sci-ppt:o066"/>
-          <p:cNvCxnSpPr/>
-          <p:nvPr/>
-        </p:nvCxnSpPr>
-        <p:spPr>
-          <a:xfrm>
-            <a:off x="5907024" y="2243644"/>
-            <a:ext cx="76580" cy="59478"/>
-          </a:xfrm>
-          <a:prstGeom prst="line">
-            <a:avLst/>
-          </a:prstGeom>
-          <a:ln w="25400">
-            <a:solidFill>
-              <a:srgbClr val="8EDBD4"/>
-            </a:solidFill>
-          </a:ln>
-          <a:effectLst/>
-        </p:spPr>
-      </p:cxnSp>
-      <p:cxnSp>
-        <p:nvCxnSpPr>
-          <p:cNvPr id="69" name="C4-E13 line 67" descr="sci-ppt:o067"/>
-          <p:cNvCxnSpPr/>
-          <p:nvPr/>
-        </p:nvCxnSpPr>
-        <p:spPr>
-          <a:xfrm>
-            <a:off x="5983604" y="2303122"/>
-            <a:ext cx="76582" cy="58809"/>
-          </a:xfrm>
-          <a:prstGeom prst="line">
-            <a:avLst/>
-          </a:prstGeom>
-          <a:ln w="25400">
-            <a:solidFill>
-              <a:srgbClr val="8EDBD4"/>
-            </a:solidFill>
-          </a:ln>
-          <a:effectLst/>
-        </p:spPr>
-      </p:cxnSp>
-      <p:cxnSp>
-        <p:nvCxnSpPr>
-          <p:cNvPr id="70" name="C4-E13 line 68" descr="sci-ppt:o068"/>
-          <p:cNvCxnSpPr/>
-          <p:nvPr/>
-        </p:nvCxnSpPr>
-        <p:spPr>
-          <a:xfrm>
-            <a:off x="6060186" y="2361931"/>
-            <a:ext cx="76581" cy="57767"/>
-          </a:xfrm>
-          <a:prstGeom prst="line">
-            <a:avLst/>
-          </a:prstGeom>
-          <a:ln w="25400">
-            <a:solidFill>
-              <a:srgbClr val="8EDBD4"/>
-            </a:solidFill>
-          </a:ln>
-          <a:effectLst/>
-        </p:spPr>
-      </p:cxnSp>
-      <p:cxnSp>
-        <p:nvCxnSpPr>
-          <p:cNvPr id="71" name="C4-E13 line 69" descr="sci-ppt:o069"/>
-          <p:cNvCxnSpPr/>
-          <p:nvPr/>
-        </p:nvCxnSpPr>
-        <p:spPr>
-          <a:xfrm>
-            <a:off x="6136767" y="2419698"/>
-            <a:ext cx="76581" cy="56341"/>
-          </a:xfrm>
-          <a:prstGeom prst="line">
-            <a:avLst/>
-          </a:prstGeom>
-          <a:ln w="25400">
-            <a:solidFill>
-              <a:srgbClr val="8EDBD4"/>
-            </a:solidFill>
-          </a:ln>
-          <a:effectLst/>
-        </p:spPr>
-      </p:cxnSp>
-      <p:cxnSp>
-        <p:nvCxnSpPr>
-          <p:cNvPr id="72" name="C4-E13 line 70" descr="sci-ppt:o070"/>
-          <p:cNvCxnSpPr/>
-          <p:nvPr/>
-        </p:nvCxnSpPr>
-        <p:spPr>
-          <a:xfrm>
-            <a:off x="6213348" y="2476039"/>
-            <a:ext cx="76581" cy="54513"/>
-          </a:xfrm>
-          <a:prstGeom prst="line">
-            <a:avLst/>
-          </a:prstGeom>
-          <a:ln w="25400">
-            <a:solidFill>
-              <a:srgbClr val="8EDBD4"/>
-            </a:solidFill>
-          </a:ln>
-          <a:effectLst/>
-        </p:spPr>
-      </p:cxnSp>
-      <p:cxnSp>
-        <p:nvCxnSpPr>
-          <p:cNvPr id="73" name="C4-E13 line 71" descr="sci-ppt:o071"/>
-          <p:cNvCxnSpPr/>
-          <p:nvPr/>
-        </p:nvCxnSpPr>
-        <p:spPr>
-          <a:xfrm>
-            <a:off x="6289929" y="2530552"/>
-            <a:ext cx="76581" cy="52270"/>
-          </a:xfrm>
-          <a:prstGeom prst="line">
-            <a:avLst/>
-          </a:prstGeom>
-          <a:ln w="25400">
-            <a:solidFill>
-              <a:srgbClr val="8EDBD4"/>
-            </a:solidFill>
-          </a:ln>
-          <a:effectLst/>
-        </p:spPr>
-      </p:cxnSp>
-      <p:cxnSp>
-        <p:nvCxnSpPr>
-          <p:cNvPr id="74" name="C4-E13 line 72" descr="sci-ppt:o072"/>
-          <p:cNvCxnSpPr/>
-          <p:nvPr/>
-        </p:nvCxnSpPr>
-        <p:spPr>
-          <a:xfrm>
-            <a:off x="6366510" y="2582822"/>
-            <a:ext cx="76581" cy="49597"/>
-          </a:xfrm>
-          <a:prstGeom prst="line">
-            <a:avLst/>
-          </a:prstGeom>
-          <a:ln w="25400">
-            <a:solidFill>
-              <a:srgbClr val="8EDBD4"/>
-            </a:solidFill>
-          </a:ln>
-          <a:effectLst/>
-        </p:spPr>
-      </p:cxnSp>
-      <p:cxnSp>
-        <p:nvCxnSpPr>
-          <p:cNvPr id="75" name="C4-E13 line 73" descr="sci-ppt:o073"/>
-          <p:cNvCxnSpPr/>
-          <p:nvPr/>
-        </p:nvCxnSpPr>
-        <p:spPr>
-          <a:xfrm>
-            <a:off x="6443091" y="2632419"/>
-            <a:ext cx="76581" cy="46480"/>
-          </a:xfrm>
-          <a:prstGeom prst="line">
-            <a:avLst/>
-          </a:prstGeom>
-          <a:ln w="25400">
-            <a:solidFill>
-              <a:srgbClr val="8EDBD4"/>
-            </a:solidFill>
-          </a:ln>
-          <a:effectLst/>
-        </p:spPr>
-      </p:cxnSp>
-      <p:cxnSp>
-        <p:nvCxnSpPr>
-          <p:cNvPr id="76" name="C4-E13 line 74" descr="sci-ppt:o074"/>
-          <p:cNvCxnSpPr/>
-          <p:nvPr/>
-        </p:nvCxnSpPr>
-        <p:spPr>
-          <a:xfrm>
-            <a:off x="6519672" y="2678899"/>
-            <a:ext cx="76581" cy="42903"/>
-          </a:xfrm>
-          <a:prstGeom prst="line">
-            <a:avLst/>
-          </a:prstGeom>
-          <a:ln w="25400">
-            <a:solidFill>
-              <a:srgbClr val="8EDBD4"/>
-            </a:solidFill>
-          </a:ln>
-          <a:effectLst/>
-        </p:spPr>
-      </p:cxnSp>
-      <p:cxnSp>
-        <p:nvCxnSpPr>
-          <p:cNvPr id="77" name="C4-E13 line 75" descr="sci-ppt:o075"/>
-          <p:cNvCxnSpPr/>
-          <p:nvPr/>
-        </p:nvCxnSpPr>
-        <p:spPr>
-          <a:xfrm>
-            <a:off x="6596253" y="2721802"/>
-            <a:ext cx="76580" cy="38853"/>
-          </a:xfrm>
-          <a:prstGeom prst="line">
-            <a:avLst/>
-          </a:prstGeom>
-          <a:ln w="25400">
-            <a:solidFill>
-              <a:srgbClr val="8EDBD4"/>
-            </a:solidFill>
-          </a:ln>
-          <a:effectLst/>
-        </p:spPr>
-      </p:cxnSp>
-      <p:cxnSp>
-        <p:nvCxnSpPr>
-          <p:cNvPr id="78" name="C4-E13 line 76" descr="sci-ppt:o076"/>
-          <p:cNvCxnSpPr/>
-          <p:nvPr/>
-        </p:nvCxnSpPr>
-        <p:spPr>
-          <a:xfrm>
-            <a:off x="6672833" y="2760655"/>
-            <a:ext cx="76582" cy="34314"/>
-          </a:xfrm>
-          <a:prstGeom prst="line">
-            <a:avLst/>
-          </a:prstGeom>
-          <a:ln w="25400">
-            <a:solidFill>
-              <a:srgbClr val="8EDBD4"/>
-            </a:solidFill>
-          </a:ln>
-          <a:effectLst/>
-        </p:spPr>
-      </p:cxnSp>
-      <p:cxnSp>
-        <p:nvCxnSpPr>
-          <p:cNvPr id="79" name="C4-E13 line 77" descr="sci-ppt:o077"/>
-          <p:cNvCxnSpPr/>
-          <p:nvPr/>
-        </p:nvCxnSpPr>
-        <p:spPr>
-          <a:xfrm>
-            <a:off x="6749415" y="2794969"/>
-            <a:ext cx="76581" cy="29274"/>
-          </a:xfrm>
-          <a:prstGeom prst="line">
-            <a:avLst/>
-          </a:prstGeom>
-          <a:ln w="25400">
-            <a:solidFill>
-              <a:srgbClr val="8EDBD4"/>
-            </a:solidFill>
-          </a:ln>
-          <a:effectLst/>
-        </p:spPr>
-      </p:cxnSp>
-      <p:cxnSp>
-        <p:nvCxnSpPr>
-          <p:cNvPr id="80" name="C4-E13 line 78" descr="sci-ppt:o078"/>
-          <p:cNvCxnSpPr/>
-          <p:nvPr/>
-        </p:nvCxnSpPr>
-        <p:spPr>
-          <a:xfrm>
-            <a:off x="6825996" y="2824243"/>
-            <a:ext cx="76581" cy="23715"/>
-          </a:xfrm>
-          <a:prstGeom prst="line">
-            <a:avLst/>
-          </a:prstGeom>
-          <a:ln w="25400">
-            <a:solidFill>
-              <a:srgbClr val="8EDBD4"/>
-            </a:solidFill>
-          </a:ln>
-          <a:effectLst/>
-        </p:spPr>
-      </p:cxnSp>
-      <p:cxnSp>
-        <p:nvCxnSpPr>
-          <p:cNvPr id="81" name="C4-E13 line 79" descr="sci-ppt:o079"/>
-          <p:cNvCxnSpPr/>
-          <p:nvPr/>
-        </p:nvCxnSpPr>
-        <p:spPr>
-          <a:xfrm>
-            <a:off x="6902577" y="2847958"/>
-            <a:ext cx="76581" cy="17624"/>
-          </a:xfrm>
-          <a:prstGeom prst="line">
-            <a:avLst/>
-          </a:prstGeom>
-          <a:ln w="25400">
-            <a:solidFill>
-              <a:srgbClr val="8EDBD4"/>
-            </a:solidFill>
-          </a:ln>
-          <a:effectLst/>
-        </p:spPr>
-      </p:cxnSp>
-      <p:cxnSp>
-        <p:nvCxnSpPr>
-          <p:cNvPr id="82" name="C4-E13 line 80" descr="sci-ppt:o080"/>
-          <p:cNvCxnSpPr/>
-          <p:nvPr/>
-        </p:nvCxnSpPr>
-        <p:spPr>
-          <a:xfrm>
-            <a:off x="6979158" y="2865582"/>
-            <a:ext cx="76581" cy="10988"/>
-          </a:xfrm>
-          <a:prstGeom prst="line">
-            <a:avLst/>
-          </a:prstGeom>
-          <a:ln w="25400">
-            <a:solidFill>
-              <a:srgbClr val="8EDBD4"/>
-            </a:solidFill>
-          </a:ln>
-          <a:effectLst/>
-        </p:spPr>
-      </p:cxnSp>
-      <p:cxnSp>
-        <p:nvCxnSpPr>
-          <p:cNvPr id="83" name="C4-E13 line 81" descr="sci-ppt:o081"/>
-          <p:cNvCxnSpPr/>
-          <p:nvPr/>
-        </p:nvCxnSpPr>
-        <p:spPr>
-          <a:xfrm>
-            <a:off x="7055739" y="2876570"/>
-            <a:ext cx="76581" cy="3790"/>
-          </a:xfrm>
-          <a:prstGeom prst="line">
-            <a:avLst/>
-          </a:prstGeom>
-          <a:ln w="25400">
-            <a:solidFill>
-              <a:srgbClr val="8EDBD4"/>
-            </a:solidFill>
-          </a:ln>
-          <a:effectLst/>
-        </p:spPr>
-      </p:cxnSp>
-      <p:sp>
-        <p:nvSpPr>
-          <p:cNvPr id="84" name="C4-E13 rect 82" descr="sci-ppt:o082"/>
-          <p:cNvSpPr/>
-          <p:nvPr/>
-        </p:nvSpPr>
-        <p:spPr>
-          <a:xfrm>
-            <a:off x="777240" y="2651760"/>
-            <a:ext cx="274320" cy="457200"/>
-          </a:xfrm>
-          <a:prstGeom prst="rect">
-            <a:avLst/>
-          </a:prstGeom>
-          <a:solidFill>
-            <a:srgbClr val="213E4B"/>
-          </a:solidFill>
-          <a:ln w="19050">
-            <a:solidFill>
-              <a:srgbClr val="B4C7D2"/>
-            </a:solidFill>
-          </a:ln>
-          <a:effectLst/>
-        </p:spPr>
         <p:txBody>
           <a:bodyPr rtlCol="0" anchor="ctr"/>
           <a:lstStyle/>
@@ -4952,70 +3987,14 @@
       </p:sp>
       <p:sp>
         <p:nvSpPr>
-          <p:cNvPr id="85" name="C4-E13 rect 83" descr="sci-ppt:o083"/>
-          <p:cNvSpPr/>
-          <p:nvPr/>
-        </p:nvSpPr>
-        <p:spPr>
-          <a:xfrm>
-            <a:off x="7086600" y="2651760"/>
-            <a:ext cx="274320" cy="457200"/>
-          </a:xfrm>
-          <a:prstGeom prst="rect">
-            <a:avLst/>
-          </a:prstGeom>
-          <a:solidFill>
-            <a:srgbClr val="213E4B"/>
-          </a:solidFill>
-          <a:ln w="19050">
-            <a:solidFill>
-              <a:srgbClr val="B4C7D2"/>
-            </a:solidFill>
-          </a:ln>
-          <a:effectLst/>
-        </p:spPr>
-        <p:txBody>
-          <a:bodyPr rtlCol="0" anchor="ctr"/>
-          <a:lstStyle/>
-          <a:p>
-            <a:pPr algn="ctr"/>
-          </a:p>
-        </p:txBody>
-      </p:sp>
-      <p:cxnSp>
-        <p:nvCxnSpPr>
-          <p:cNvPr id="86" name="C4-E13 arrow 84" descr="sci-ppt:o084"/>
-          <p:cNvCxnSpPr/>
-          <p:nvPr/>
-        </p:nvCxnSpPr>
-        <p:spPr>
-          <a:xfrm flipV="1">
-            <a:off x="4069080" y="1371600"/>
-            <a:ext cx="0" cy="1463040"/>
-          </a:xfrm>
-          <a:prstGeom prst="line">
-            <a:avLst/>
-          </a:prstGeom>
-          <a:ln w="25400">
-            <a:solidFill>
-              <a:srgbClr val="8EDBD4"/>
-            </a:solidFill>
-            <a:headEnd type="none" w="med" len="med"/>
-            <a:tailEnd type="triangle" w="med" len="med"/>
-          </a:ln>
-          <a:effectLst/>
-        </p:spPr>
-      </p:cxnSp>
-      <p:sp>
-        <p:nvSpPr>
-          <p:cNvPr id="87" name="C4-E13 text 85" descr="sci-ppt:o085"/>
+          <p:cNvPr id="27" name="C4-E13 text 25" descr="sci-ppt:o025"/>
           <p:cNvSpPr txBox="1"/>
           <p:nvPr/>
         </p:nvSpPr>
         <p:spPr>
           <a:xfrm>
-            <a:off x="4206240" y="1920240"/>
-            <a:ext cx="2560320" cy="411480"/>
+            <a:off x="6995160" y="4206240"/>
+            <a:ext cx="4754880" cy="417576"/>
           </a:xfrm>
           <a:prstGeom prst="rect">
             <a:avLst/>
@@ -5024,7 +4003,7 @@
           <a:effectLst/>
         </p:spPr>
         <p:txBody>
-          <a:bodyPr wrap="square" lIns="27432" rIns="27432" tIns="18288" bIns="18288" anchor="ctr">
+          <a:bodyPr wrap="none" lIns="18288" rIns="18288" tIns="18288" bIns="18288" anchor="t">
             <a:spAutoFit/>
           </a:bodyPr>
           <a:lstStyle/>
@@ -5035,99 +4014,43 @@
               </a:spcAft>
             </a:pPr>
             <a:r>
-              <a:rPr sz="1800" b="0" i="0">
+              <a:rPr sz="1200" b="0" i="0">
                 <a:solidFill>
-                  <a:srgbClr val="E7F0F3"/>
+                  <a:srgbClr val="B4C7D2"/>
                 </a:solidFill>
                 <a:latin typeface="Arial"/>
               </a:rPr>
-              <a:t>w(r) ↑</a:t>
-            </a:r>
-          </a:p>
-        </p:txBody>
-      </p:sp>
-      <p:cxnSp>
-        <p:nvCxnSpPr>
-          <p:cNvPr id="88" name="C4-E13 arrow 86" descr="sci-ppt:o086"/>
-          <p:cNvCxnSpPr/>
-          <p:nvPr/>
-        </p:nvCxnSpPr>
-        <p:spPr>
-          <a:xfrm flipV="1">
-            <a:off x="2286000" y="2971800"/>
-            <a:ext cx="0" cy="594360"/>
-          </a:xfrm>
-          <a:prstGeom prst="line">
-            <a:avLst/>
-          </a:prstGeom>
-          <a:ln w="25400">
-            <a:solidFill>
-              <a:srgbClr val="8EDBD4"/>
-            </a:solidFill>
-            <a:headEnd type="none" w="med" len="med"/>
-            <a:tailEnd type="triangle" w="med" len="med"/>
-          </a:ln>
-          <a:effectLst/>
-        </p:spPr>
-      </p:cxnSp>
-      <p:cxnSp>
-        <p:nvCxnSpPr>
-          <p:cNvPr id="89" name="C4-E13 arrow 87" descr="sci-ppt:o087"/>
-          <p:cNvCxnSpPr/>
-          <p:nvPr/>
-        </p:nvCxnSpPr>
-        <p:spPr>
-          <a:xfrm flipV="1">
-            <a:off x="4069080" y="2971800"/>
-            <a:ext cx="0" cy="594360"/>
-          </a:xfrm>
-          <a:prstGeom prst="line">
-            <a:avLst/>
-          </a:prstGeom>
-          <a:ln w="25400">
-            <a:solidFill>
-              <a:srgbClr val="8EDBD4"/>
-            </a:solidFill>
-            <a:headEnd type="none" w="med" len="med"/>
-            <a:tailEnd type="triangle" w="med" len="med"/>
-          </a:ln>
-          <a:effectLst/>
-        </p:spPr>
-      </p:cxnSp>
-      <p:cxnSp>
-        <p:nvCxnSpPr>
-          <p:cNvPr id="90" name="C4-E13 arrow 88" descr="sci-ppt:o088"/>
-          <p:cNvCxnSpPr/>
-          <p:nvPr/>
-        </p:nvCxnSpPr>
-        <p:spPr>
-          <a:xfrm flipV="1">
-            <a:off x="5852160" y="2971800"/>
-            <a:ext cx="0" cy="594360"/>
-          </a:xfrm>
-          <a:prstGeom prst="line">
-            <a:avLst/>
-          </a:prstGeom>
-          <a:ln w="25400">
-            <a:solidFill>
-              <a:srgbClr val="8EDBD4"/>
-            </a:solidFill>
-            <a:headEnd type="none" w="med" len="med"/>
-            <a:tailEnd type="triangle" w="med" len="med"/>
-          </a:ln>
-          <a:effectLst/>
-        </p:spPr>
-      </p:cxnSp>
-      <p:sp>
-        <p:nvSpPr>
-          <p:cNvPr id="91" name="C4-E13 text 89" descr="sci-ppt:o089"/>
+              <a:t>Teaching film: h_f = 10 µm, E_f = 2 GPa, ν = 0.35: D_f =</a:t>
+            </a:r>
+          </a:p>
+          <a:p>
+            <a:pPr algn="l">
+              <a:spcAft>
+                <a:spcPts val="0"/>
+              </a:spcAft>
+            </a:pPr>
+            <a:r>
+              <a:rPr sz="1200" b="0" i="0">
+                <a:solidFill>
+                  <a:srgbClr val="B4C7D2"/>
+                </a:solidFill>
+                <a:latin typeface="Arial"/>
+              </a:rPr>
+              <a:t>1.899e-07 N m; b = 100 µm.</a:t>
+            </a:r>
+          </a:p>
+        </p:txBody>
+      </p:sp>
+      <p:sp>
+        <p:nvSpPr>
+          <p:cNvPr id="28" name="C4-E13 text 26" descr="sci-ppt:o026"/>
           <p:cNvSpPr txBox="1"/>
           <p:nvPr/>
         </p:nvSpPr>
         <p:spPr>
           <a:xfrm>
-            <a:off x="2834640" y="3611880"/>
-            <a:ext cx="3657600" cy="274320"/>
+            <a:off x="320040" y="6510528"/>
+            <a:ext cx="11521440" cy="200660"/>
           </a:xfrm>
           <a:prstGeom prst="rect">
             <a:avLst/>
@@ -5136,665 +4059,7 @@
           <a:effectLst/>
         </p:spPr>
         <p:txBody>
-          <a:bodyPr wrap="square" lIns="27432" rIns="27432" tIns="18288" bIns="18288" anchor="ctr">
-            <a:spAutoFit/>
-          </a:bodyPr>
-          <a:lstStyle/>
-          <a:p>
-            <a:pPr algn="l">
-              <a:spcAft>
-                <a:spcPts val="0"/>
-              </a:spcAft>
-            </a:pPr>
-            <a:r>
-              <a:rPr sz="1600" b="0" i="0">
-                <a:solidFill>
-                  <a:srgbClr val="E7F0F3"/>
-                </a:solidFill>
-                <a:latin typeface="Arial"/>
-              </a:rPr>
-              <a:t>p₀: maintained pressure</a:t>
-            </a:r>
-          </a:p>
-        </p:txBody>
-      </p:sp>
-      <p:cxnSp>
-        <p:nvCxnSpPr>
-          <p:cNvPr id="92" name="C4-E13 line 90" descr="sci-ppt:o090"/>
-          <p:cNvCxnSpPr/>
-          <p:nvPr/>
-        </p:nvCxnSpPr>
-        <p:spPr>
-          <a:xfrm>
-            <a:off x="4069080" y="3200400"/>
-            <a:ext cx="3063240" cy="0"/>
-          </a:xfrm>
-          <a:prstGeom prst="line">
-            <a:avLst/>
-          </a:prstGeom>
-          <a:ln w="25400">
-            <a:solidFill>
-              <a:srgbClr val="8EDBD4"/>
-            </a:solidFill>
-          </a:ln>
-          <a:effectLst/>
-        </p:spPr>
-      </p:cxnSp>
-      <p:sp>
-        <p:nvSpPr>
-          <p:cNvPr id="93" name="C4-E13 text 91" descr="sci-ppt:o091"/>
-          <p:cNvSpPr txBox="1"/>
-          <p:nvPr/>
-        </p:nvSpPr>
-        <p:spPr>
-          <a:xfrm>
-            <a:off x="5486400" y="3246120"/>
-            <a:ext cx="914400" cy="274320"/>
-          </a:xfrm>
-          <a:prstGeom prst="rect">
-            <a:avLst/>
-          </a:prstGeom>
-          <a:noFill/>
-          <a:effectLst/>
-        </p:spPr>
-        <p:txBody>
-          <a:bodyPr wrap="square" lIns="27432" rIns="27432" tIns="18288" bIns="18288" anchor="ctr">
-            <a:spAutoFit/>
-          </a:bodyPr>
-          <a:lstStyle/>
-          <a:p>
-            <a:pPr algn="l">
-              <a:spcAft>
-                <a:spcPts val="0"/>
-              </a:spcAft>
-            </a:pPr>
-            <a:r>
-              <a:rPr sz="1600" b="0" i="0">
-                <a:solidFill>
-                  <a:srgbClr val="E7F0F3"/>
-                </a:solidFill>
-                <a:latin typeface="Arial"/>
-              </a:rPr>
-              <a:t>b</a:t>
-            </a:r>
-          </a:p>
-        </p:txBody>
-      </p:sp>
-      <p:sp>
-        <p:nvSpPr>
-          <p:cNvPr id="94" name="C4-E13 ellipse 92" descr="sci-ppt:o092"/>
-          <p:cNvSpPr/>
-          <p:nvPr/>
-        </p:nvSpPr>
-        <p:spPr>
-          <a:xfrm>
-            <a:off x="8686800" y="1097280"/>
-            <a:ext cx="1920240" cy="1920240"/>
-          </a:xfrm>
-          <a:prstGeom prst="ellipse">
-            <a:avLst/>
-          </a:prstGeom>
-          <a:noFill/>
-          <a:ln w="19050">
-            <a:solidFill>
-              <a:srgbClr val="B4C7D2"/>
-            </a:solidFill>
-          </a:ln>
-          <a:effectLst/>
-        </p:spPr>
-        <p:txBody>
-          <a:bodyPr rtlCol="0" anchor="ctr"/>
-          <a:lstStyle/>
-          <a:p>
-            <a:pPr algn="ctr"/>
-          </a:p>
-        </p:txBody>
-      </p:sp>
-      <p:cxnSp>
-        <p:nvCxnSpPr>
-          <p:cNvPr id="95" name="C4-E13 arrow 93" descr="sci-ppt:o093"/>
-          <p:cNvCxnSpPr/>
-          <p:nvPr/>
-        </p:nvCxnSpPr>
-        <p:spPr>
-          <a:xfrm>
-            <a:off x="9646920" y="2057400"/>
-            <a:ext cx="960120" cy="0"/>
-          </a:xfrm>
-          <a:prstGeom prst="line">
-            <a:avLst/>
-          </a:prstGeom>
-          <a:ln w="25400">
-            <a:solidFill>
-              <a:srgbClr val="8EDBD4"/>
-            </a:solidFill>
-            <a:headEnd type="none" w="med" len="med"/>
-            <a:tailEnd type="triangle" w="med" len="med"/>
-          </a:ln>
-          <a:effectLst/>
-        </p:spPr>
-      </p:cxnSp>
-      <p:sp>
-        <p:nvSpPr>
-          <p:cNvPr id="96" name="C4-E13 text 94" descr="sci-ppt:o094"/>
-          <p:cNvSpPr txBox="1"/>
-          <p:nvPr/>
-        </p:nvSpPr>
-        <p:spPr>
-          <a:xfrm>
-            <a:off x="9875520" y="1645920"/>
-            <a:ext cx="914400" cy="274320"/>
-          </a:xfrm>
-          <a:prstGeom prst="rect">
-            <a:avLst/>
-          </a:prstGeom>
-          <a:noFill/>
-          <a:effectLst/>
-        </p:spPr>
-        <p:txBody>
-          <a:bodyPr wrap="square" lIns="27432" rIns="27432" tIns="18288" bIns="18288" anchor="ctr">
-            <a:spAutoFit/>
-          </a:bodyPr>
-          <a:lstStyle/>
-          <a:p>
-            <a:pPr algn="l">
-              <a:spcAft>
-                <a:spcPts val="0"/>
-              </a:spcAft>
-            </a:pPr>
-            <a:r>
-              <a:rPr sz="1700" b="0" i="0">
-                <a:solidFill>
-                  <a:srgbClr val="E7F0F3"/>
-                </a:solidFill>
-                <a:latin typeface="Arial"/>
-              </a:rPr>
-              <a:t>b</a:t>
-            </a:r>
-          </a:p>
-        </p:txBody>
-      </p:sp>
-      <p:sp>
-        <p:nvSpPr>
-          <p:cNvPr id="97" name="C4-E13 text 95" descr="sci-ppt:o095"/>
-          <p:cNvSpPr txBox="1"/>
-          <p:nvPr/>
-        </p:nvSpPr>
-        <p:spPr>
-          <a:xfrm>
-            <a:off x="8503920" y="3291840"/>
-            <a:ext cx="2743200" cy="365760"/>
-          </a:xfrm>
-          <a:prstGeom prst="rect">
-            <a:avLst/>
-          </a:prstGeom>
-          <a:noFill/>
-          <a:effectLst/>
-        </p:spPr>
-        <p:txBody>
-          <a:bodyPr wrap="square" lIns="27432" rIns="27432" tIns="18288" bIns="18288" anchor="ctr">
-            <a:spAutoFit/>
-          </a:bodyPr>
-          <a:lstStyle/>
-          <a:p>
-            <a:pPr algn="l">
-              <a:spcAft>
-                <a:spcPts val="0"/>
-              </a:spcAft>
-            </a:pPr>
-            <a:r>
-              <a:rPr sz="1800" b="0" i="0">
-                <a:solidFill>
-                  <a:srgbClr val="E7F0F3"/>
-                </a:solidFill>
-                <a:latin typeface="Arial"/>
-              </a:rPr>
-              <a:t>A_c = π b²</a:t>
-            </a:r>
-          </a:p>
-        </p:txBody>
-      </p:sp>
-      <p:sp>
-        <p:nvSpPr>
-          <p:cNvPr id="98" name="C4-E13 text 96" descr="sci-ppt:o096"/>
-          <p:cNvSpPr txBox="1"/>
-          <p:nvPr/>
-        </p:nvSpPr>
-        <p:spPr>
-          <a:xfrm>
-            <a:off x="685800" y="731520"/>
-            <a:ext cx="10972800" cy="365760"/>
-          </a:xfrm>
-          <a:prstGeom prst="rect">
-            <a:avLst/>
-          </a:prstGeom>
-          <a:noFill/>
-          <a:effectLst/>
-        </p:spPr>
-        <p:txBody>
-          <a:bodyPr wrap="square" lIns="27432" rIns="27432" tIns="18288" bIns="18288" anchor="ctr">
-            <a:spAutoFit/>
-          </a:bodyPr>
-          <a:lstStyle/>
-          <a:p>
-            <a:pPr algn="l">
-              <a:spcAft>
-                <a:spcPts val="0"/>
-              </a:spcAft>
-            </a:pPr>
-            <a:r>
-              <a:rPr sz="1800" b="0" i="0">
-                <a:solidFill>
-                  <a:srgbClr val="8EDBD4"/>
-                </a:solidFill>
-                <a:latin typeface="Arial"/>
-              </a:rPr>
-              <a:t>Clamped circular blister: w(b) = 0; w′(b) = 0; regular centre.</a:t>
-            </a:r>
-          </a:p>
-        </p:txBody>
-      </p:sp>
-      <p:cxnSp>
-        <p:nvCxnSpPr>
-          <p:cNvPr id="99" name="C4-E13 line 97" descr="sci-ppt:o097"/>
-          <p:cNvCxnSpPr/>
-          <p:nvPr/>
-        </p:nvCxnSpPr>
-        <p:spPr>
-          <a:xfrm>
-            <a:off x="274320" y="3977639"/>
-            <a:ext cx="11612880" cy="0"/>
-          </a:xfrm>
-          <a:prstGeom prst="line">
-            <a:avLst/>
-          </a:prstGeom>
-          <a:ln w="12700">
-            <a:solidFill>
-              <a:srgbClr val="405967"/>
-            </a:solidFill>
-          </a:ln>
-          <a:effectLst/>
-        </p:spPr>
-      </p:cxnSp>
-      <p:sp>
-        <p:nvSpPr>
-          <p:cNvPr id="100" name="C4-E13 text 98" descr="sci-ppt:o098"/>
-          <p:cNvSpPr txBox="1"/>
-          <p:nvPr/>
-        </p:nvSpPr>
-        <p:spPr>
-          <a:xfrm>
-            <a:off x="320040" y="4096512"/>
-            <a:ext cx="5715000" cy="246888"/>
-          </a:xfrm>
-          <a:prstGeom prst="rect">
-            <a:avLst/>
-          </a:prstGeom>
-          <a:noFill/>
-          <a:effectLst/>
-        </p:spPr>
-        <p:txBody>
-          <a:bodyPr wrap="square" lIns="27432" rIns="27432" tIns="18288" bIns="18288" anchor="ctr">
-            <a:spAutoFit/>
-          </a:bodyPr>
-          <a:lstStyle/>
-          <a:p>
-            <a:pPr algn="l">
-              <a:spcAft>
-                <a:spcPts val="0"/>
-              </a:spcAft>
-            </a:pPr>
-            <a:r>
-              <a:rPr sz="1150" b="0" i="0">
-                <a:solidFill>
-                  <a:srgbClr val="B4C7D2"/>
-                </a:solidFill>
-                <a:latin typeface="Arial"/>
-              </a:rPr>
-              <a:t>• r = 0 — regular centre</a:t>
-            </a:r>
-          </a:p>
-        </p:txBody>
-      </p:sp>
-      <p:sp>
-        <p:nvSpPr>
-          <p:cNvPr id="101" name="C4-E13 text 99" descr="sci-ppt:o099"/>
-          <p:cNvSpPr txBox="1"/>
-          <p:nvPr/>
-        </p:nvSpPr>
-        <p:spPr>
-          <a:xfrm>
-            <a:off x="6217920" y="4096512"/>
-            <a:ext cx="5715000" cy="246888"/>
-          </a:xfrm>
-          <a:prstGeom prst="rect">
-            <a:avLst/>
-          </a:prstGeom>
-          <a:noFill/>
-          <a:effectLst/>
-        </p:spPr>
-        <p:txBody>
-          <a:bodyPr wrap="square" lIns="27432" rIns="27432" tIns="18288" bIns="18288" anchor="ctr">
-            <a:spAutoFit/>
-          </a:bodyPr>
-          <a:lstStyle/>
-          <a:p>
-            <a:pPr algn="l">
-              <a:spcAft>
-                <a:spcPts val="0"/>
-              </a:spcAft>
-            </a:pPr>
-            <a:r>
-              <a:rPr sz="1150" b="0" i="0">
-                <a:solidFill>
-                  <a:srgbClr val="B4C7D2"/>
-                </a:solidFill>
-                <a:latin typeface="Arial"/>
-              </a:rPr>
-              <a:t>• r = b — clamped crack front</a:t>
-            </a:r>
-          </a:p>
-        </p:txBody>
-      </p:sp>
-      <p:sp>
-        <p:nvSpPr>
-          <p:cNvPr id="102" name="C4-E13 text 100" descr="sci-ppt:o100"/>
-          <p:cNvSpPr txBox="1"/>
-          <p:nvPr/>
-        </p:nvSpPr>
-        <p:spPr>
-          <a:xfrm>
-            <a:off x="320040" y="4329684"/>
-            <a:ext cx="5715000" cy="246888"/>
-          </a:xfrm>
-          <a:prstGeom prst="rect">
-            <a:avLst/>
-          </a:prstGeom>
-          <a:noFill/>
-          <a:effectLst/>
-        </p:spPr>
-        <p:txBody>
-          <a:bodyPr wrap="square" lIns="27432" rIns="27432" tIns="18288" bIns="18288" anchor="ctr">
-            <a:spAutoFit/>
-          </a:bodyPr>
-          <a:lstStyle/>
-          <a:p>
-            <a:pPr algn="l">
-              <a:spcAft>
-                <a:spcPts val="0"/>
-              </a:spcAft>
-            </a:pPr>
-            <a:r>
-              <a:rPr sz="1150" b="0" i="0">
-                <a:solidFill>
-                  <a:srgbClr val="B4C7D2"/>
-                </a:solidFill>
-                <a:latin typeface="Arial"/>
-              </a:rPr>
-              <a:t>• p₀ ↑ uniform maintained pressure</a:t>
-            </a:r>
-          </a:p>
-        </p:txBody>
-      </p:sp>
-      <p:sp>
-        <p:nvSpPr>
-          <p:cNvPr id="103" name="C4-E13 text 101" descr="sci-ppt:o101"/>
-          <p:cNvSpPr txBox="1"/>
-          <p:nvPr/>
-        </p:nvSpPr>
-        <p:spPr>
-          <a:xfrm>
-            <a:off x="6217920" y="4329684"/>
-            <a:ext cx="5715000" cy="246888"/>
-          </a:xfrm>
-          <a:prstGeom prst="rect">
-            <a:avLst/>
-          </a:prstGeom>
-          <a:noFill/>
-          <a:effectLst/>
-        </p:spPr>
-        <p:txBody>
-          <a:bodyPr wrap="square" lIns="27432" rIns="27432" tIns="18288" bIns="18288" anchor="ctr">
-            <a:spAutoFit/>
-          </a:bodyPr>
-          <a:lstStyle/>
-          <a:p>
-            <a:pPr algn="l">
-              <a:spcAft>
-                <a:spcPts val="0"/>
-              </a:spcAft>
-            </a:pPr>
-            <a:r>
-              <a:rPr sz="1150" b="0" i="0">
-                <a:solidFill>
-                  <a:srgbClr val="B4C7D2"/>
-                </a:solidFill>
-                <a:latin typeface="Arial"/>
-              </a:rPr>
-              <a:t>• D_f — plate stiffness</a:t>
-            </a:r>
-          </a:p>
-        </p:txBody>
-      </p:sp>
-      <p:sp>
-        <p:nvSpPr>
-          <p:cNvPr id="104" name="C4-E13 text 102" descr="sci-ppt:o102"/>
-          <p:cNvSpPr txBox="1"/>
-          <p:nvPr/>
-        </p:nvSpPr>
-        <p:spPr>
-          <a:xfrm>
-            <a:off x="320040" y="4562856"/>
-            <a:ext cx="5715000" cy="246888"/>
-          </a:xfrm>
-          <a:prstGeom prst="rect">
-            <a:avLst/>
-          </a:prstGeom>
-          <a:noFill/>
-          <a:effectLst/>
-        </p:spPr>
-        <p:txBody>
-          <a:bodyPr wrap="square" lIns="27432" rIns="27432" tIns="18288" bIns="18288" anchor="ctr">
-            <a:spAutoFit/>
-          </a:bodyPr>
-          <a:lstStyle/>
-          <a:p>
-            <a:pPr algn="l">
-              <a:spcAft>
-                <a:spcPts val="0"/>
-              </a:spcAft>
-            </a:pPr>
-            <a:r>
-              <a:rPr sz="1150" b="0" i="0">
-                <a:solidFill>
-                  <a:srgbClr val="B4C7D2"/>
-                </a:solidFill>
-                <a:latin typeface="Arial"/>
-              </a:rPr>
-              <a:t>• w(r) ↑ opening</a:t>
-            </a:r>
-          </a:p>
-        </p:txBody>
-      </p:sp>
-      <p:sp>
-        <p:nvSpPr>
-          <p:cNvPr id="105" name="C4-E13 text 103" descr="sci-ppt:o103"/>
-          <p:cNvSpPr txBox="1"/>
-          <p:nvPr/>
-        </p:nvSpPr>
-        <p:spPr>
-          <a:xfrm>
-            <a:off x="6217920" y="4562856"/>
-            <a:ext cx="5715000" cy="246888"/>
-          </a:xfrm>
-          <a:prstGeom prst="rect">
-            <a:avLst/>
-          </a:prstGeom>
-          <a:noFill/>
-          <a:effectLst/>
-        </p:spPr>
-        <p:txBody>
-          <a:bodyPr wrap="square" lIns="27432" rIns="27432" tIns="18288" bIns="18288" anchor="ctr">
-            <a:spAutoFit/>
-          </a:bodyPr>
-          <a:lstStyle/>
-          <a:p>
-            <a:pPr algn="l">
-              <a:spcAft>
-                <a:spcPts val="0"/>
-              </a:spcAft>
-            </a:pPr>
-            <a:r>
-              <a:rPr sz="1150" b="0" i="0">
-                <a:solidFill>
-                  <a:srgbClr val="B4C7D2"/>
-                </a:solidFill>
-                <a:latin typeface="Arial"/>
-              </a:rPr>
-              <a:t>• g = L_r w — curvature sum</a:t>
-            </a:r>
-          </a:p>
-        </p:txBody>
-      </p:sp>
-      <p:sp>
-        <p:nvSpPr>
-          <p:cNvPr id="106" name="C4-E13 text 104" descr="sci-ppt:o104"/>
-          <p:cNvSpPr txBox="1"/>
-          <p:nvPr/>
-        </p:nvSpPr>
-        <p:spPr>
-          <a:xfrm>
-            <a:off x="320040" y="4796028"/>
-            <a:ext cx="5715000" cy="246888"/>
-          </a:xfrm>
-          <a:prstGeom prst="rect">
-            <a:avLst/>
-          </a:prstGeom>
-          <a:noFill/>
-          <a:effectLst/>
-        </p:spPr>
-        <p:txBody>
-          <a:bodyPr wrap="square" lIns="27432" rIns="27432" tIns="18288" bIns="18288" anchor="ctr">
-            <a:spAutoFit/>
-          </a:bodyPr>
-          <a:lstStyle/>
-          <a:p>
-            <a:pPr algn="l">
-              <a:spcAft>
-                <a:spcPts val="0"/>
-              </a:spcAft>
-            </a:pPr>
-            <a:r>
-              <a:rPr sz="1150" b="0" i="0">
-                <a:solidFill>
-                  <a:srgbClr val="B4C7D2"/>
-                </a:solidFill>
-                <a:latin typeface="Arial"/>
-              </a:rPr>
-              <a:t>• f — radial test function</a:t>
-            </a:r>
-          </a:p>
-        </p:txBody>
-      </p:sp>
-      <p:sp>
-        <p:nvSpPr>
-          <p:cNvPr id="107" name="C4-E13 text 105" descr="sci-ppt:o105"/>
-          <p:cNvSpPr txBox="1"/>
-          <p:nvPr/>
-        </p:nvSpPr>
-        <p:spPr>
-          <a:xfrm>
-            <a:off x="320040" y="5596128"/>
-            <a:ext cx="11430000" cy="292608"/>
-          </a:xfrm>
-          <a:prstGeom prst="rect">
-            <a:avLst/>
-          </a:prstGeom>
-          <a:noFill/>
-          <a:effectLst/>
-        </p:spPr>
-        <p:txBody>
-          <a:bodyPr wrap="square" lIns="27432" rIns="27432" tIns="18288" bIns="18288" anchor="ctr">
-            <a:spAutoFit/>
-          </a:bodyPr>
-          <a:lstStyle/>
-          <a:p>
-            <a:pPr algn="l">
-              <a:spcAft>
-                <a:spcPts val="0"/>
-              </a:spcAft>
-            </a:pPr>
-            <a:r>
-              <a:rPr sz="1150" b="0" i="0">
-                <a:solidFill>
-                  <a:srgbClr val="8EDBD4"/>
-                </a:solidFill>
-                <a:latin typeface="Arial"/>
-              </a:rPr>
-              <a:t>No point force at the centre.</a:t>
-            </a:r>
-          </a:p>
-        </p:txBody>
-      </p:sp>
-      <p:sp>
-        <p:nvSpPr>
-          <p:cNvPr id="108" name="C4-E13 text 106" descr="sci-ppt:o106"/>
-          <p:cNvSpPr txBox="1"/>
-          <p:nvPr/>
-        </p:nvSpPr>
-        <p:spPr>
-          <a:xfrm>
-            <a:off x="320040" y="5870448"/>
-            <a:ext cx="11430000" cy="292608"/>
-          </a:xfrm>
-          <a:prstGeom prst="rect">
-            <a:avLst/>
-          </a:prstGeom>
-          <a:noFill/>
-          <a:effectLst/>
-        </p:spPr>
-        <p:txBody>
-          <a:bodyPr wrap="square" lIns="27432" rIns="27432" tIns="18288" bIns="18288" anchor="ctr">
-            <a:spAutoFit/>
-          </a:bodyPr>
-          <a:lstStyle/>
-          <a:p>
-            <a:pPr algn="l">
-              <a:spcAft>
-                <a:spcPts val="0"/>
-              </a:spcAft>
-            </a:pPr>
-            <a:r>
-              <a:rPr sz="1150" b="0" i="0">
-                <a:solidFill>
-                  <a:srgbClr val="8EDBD4"/>
-                </a:solidFill>
-                <a:latin typeface="Arial"/>
-              </a:rPr>
-              <a:t>External pressure remains fixed as b changes.</a:t>
-            </a:r>
-          </a:p>
-        </p:txBody>
-      </p:sp>
-      <p:sp>
-        <p:nvSpPr>
-          <p:cNvPr id="109" name="C4-E13 text 107" descr="sci-ppt:o107"/>
-          <p:cNvSpPr txBox="1"/>
-          <p:nvPr/>
-        </p:nvSpPr>
-        <p:spPr>
-          <a:xfrm>
-            <a:off x="320040" y="6473952"/>
-            <a:ext cx="11430000" cy="256032"/>
-          </a:xfrm>
-          <a:prstGeom prst="rect">
-            <a:avLst/>
-          </a:prstGeom>
-          <a:noFill/>
-          <a:effectLst/>
-        </p:spPr>
-        <p:txBody>
-          <a:bodyPr wrap="square" lIns="27432" rIns="27432" tIns="18288" bIns="18288" anchor="ctr">
+          <a:bodyPr wrap="none" lIns="18288" rIns="18288" tIns="18288" bIns="18288" anchor="t">
             <a:spAutoFit/>
           </a:bodyPr>
           <a:lstStyle/>
@@ -5811,7 +4076,7 @@
                 </a:solidFill>
                 <a:latin typeface="Arial"/>
               </a:rPr>
-              <a:t>Model schematic; geometry is not to scale.</a:t>
+              <a:t>Quasistatic circular-plate boundary-value problem of Eq. C4-E13.</a:t>
             </a:r>
           </a:p>
         </p:txBody>
